--- a/Resources-Notes-Ppts/ASP-NET-Identity/ASPNET_Identity.pptx
+++ b/Resources-Notes-Ppts/ASP-NET-Identity/ASPNET_Identity.pptx
@@ -5,7 +5,7 @@
     <p:sldMasterId id="2147483671" r:id="rId1"/>
   </p:sldMasterIdLst>
   <p:notesMasterIdLst>
-    <p:notesMasterId r:id="rId11"/>
+    <p:notesMasterId r:id="rId16"/>
   </p:notesMasterIdLst>
   <p:sldIdLst>
     <p:sldId id="256" r:id="rId2"/>
@@ -17,20 +17,25 @@
     <p:sldId id="264" r:id="rId8"/>
     <p:sldId id="265" r:id="rId9"/>
     <p:sldId id="266" r:id="rId10"/>
+    <p:sldId id="267" r:id="rId11"/>
+    <p:sldId id="268" r:id="rId12"/>
+    <p:sldId id="269" r:id="rId13"/>
+    <p:sldId id="270" r:id="rId14"/>
+    <p:sldId id="271" r:id="rId15"/>
   </p:sldIdLst>
   <p:sldSz cx="9144000" cy="5143500" type="screen16x9"/>
   <p:notesSz cx="6858000" cy="9144000"/>
   <p:embeddedFontLst>
     <p:embeddedFont>
       <p:font typeface="Hammersmith One" panose="02010703030501060504" pitchFamily="2" charset="0"/>
-      <p:regular r:id="rId12"/>
+      <p:regular r:id="rId17"/>
     </p:embeddedFont>
     <p:embeddedFont>
       <p:font typeface="Source Sans Pro" panose="020B0503030403020204" pitchFamily="34" charset="0"/>
-      <p:regular r:id="rId13"/>
-      <p:bold r:id="rId14"/>
-      <p:italic r:id="rId15"/>
-      <p:boldItalic r:id="rId16"/>
+      <p:regular r:id="rId18"/>
+      <p:bold r:id="rId19"/>
+      <p:italic r:id="rId20"/>
+      <p:boldItalic r:id="rId21"/>
     </p:embeddedFont>
   </p:embeddedFontLst>
   <p:defaultTextStyle>
@@ -29050,6 +29055,1374 @@
         </p:sp>
       </p:grpSp>
     </p:spTree>
+  </p:cSld>
+  <p:clrMapOvr>
+    <a:masterClrMapping/>
+  </p:clrMapOvr>
+</p:sld>
+</file>
+
+<file path=ppt/slides/slide10.xml><?xml version="1.0" encoding="utf-8"?>
+<p:sld xmlns:a="http://schemas.openxmlformats.org/drawingml/2006/main" xmlns:r="http://schemas.openxmlformats.org/officeDocument/2006/relationships" xmlns:p="http://schemas.openxmlformats.org/presentationml/2006/main">
+  <p:cSld>
+    <p:spTree>
+      <p:nvGrpSpPr>
+        <p:cNvPr id="1" name=""/>
+        <p:cNvGrpSpPr/>
+        <p:nvPr/>
+      </p:nvGrpSpPr>
+      <p:grpSpPr>
+        <a:xfrm>
+          <a:off x="0" y="0"/>
+          <a:ext cx="0" cy="0"/>
+          <a:chOff x="0" y="0"/>
+          <a:chExt cx="0" cy="0"/>
+        </a:xfrm>
+      </p:grpSpPr>
+      <p:sp>
+        <p:nvSpPr>
+          <p:cNvPr id="2" name="Text Placeholder 1">
+            <a:extLst>
+              <a:ext uri="{FF2B5EF4-FFF2-40B4-BE49-F238E27FC236}">
+                <a16:creationId xmlns:a16="http://schemas.microsoft.com/office/drawing/2014/main" id="{3425B37F-5817-1BCE-B03E-13458F7C0725}"/>
+              </a:ext>
+            </a:extLst>
+          </p:cNvPr>
+          <p:cNvSpPr>
+            <a:spLocks noGrp="1"/>
+          </p:cNvSpPr>
+          <p:nvPr>
+            <p:ph type="body" idx="1"/>
+          </p:nvPr>
+        </p:nvSpPr>
+        <p:spPr/>
+        <p:txBody>
+          <a:bodyPr/>
+          <a:lstStyle/>
+          <a:p>
+            <a:r>
+              <a:rPr lang="en-US" dirty="0"/>
+              <a:t>HTTPS = Hypertext Transfer Protocol Secure</a:t>
+            </a:r>
+          </a:p>
+          <a:p>
+            <a:r>
+              <a:rPr lang="en-US" dirty="0"/>
+              <a:t>HTTPS uses Transport Layer Security (TLS) to encrypt traffic (formerly used Secure Sockets Layer – SSL)</a:t>
+            </a:r>
+          </a:p>
+          <a:p>
+            <a:pPr lvl="1"/>
+            <a:r>
+              <a:rPr lang="en-US" dirty="0"/>
+              <a:t>The server must present a certificate to verify its identity, this proves that the URL you visit actually owns that domain</a:t>
+            </a:r>
+          </a:p>
+          <a:p>
+            <a:pPr lvl="1"/>
+            <a:r>
+              <a:rPr lang="en-US" dirty="0"/>
+              <a:t>Certificates are provided by certificate authorities: Let’s Encrypt, DigiCert, </a:t>
+            </a:r>
+            <a:r>
+              <a:rPr lang="en-US" dirty="0" err="1"/>
+              <a:t>Sectigo</a:t>
+            </a:r>
+            <a:r>
+              <a:rPr lang="en-US" dirty="0"/>
+              <a:t>, etc. </a:t>
+            </a:r>
+          </a:p>
+          <a:p>
+            <a:r>
+              <a:rPr lang="en-US" dirty="0"/>
+              <a:t>Protects against man-in-the-middle attacks (data interception/manipulation)</a:t>
+            </a:r>
+          </a:p>
+          <a:p>
+            <a:r>
+              <a:rPr lang="en-US" dirty="0"/>
+              <a:t>Improves search engine optimization (SEO)</a:t>
+            </a:r>
+          </a:p>
+          <a:p>
+            <a:r>
+              <a:rPr lang="en-US" dirty="0"/>
+              <a:t>Default port for HTTP = 80, HTTPS = 443</a:t>
+            </a:r>
+          </a:p>
+        </p:txBody>
+      </p:sp>
+      <p:sp>
+        <p:nvSpPr>
+          <p:cNvPr id="3" name="Title 2">
+            <a:extLst>
+              <a:ext uri="{FF2B5EF4-FFF2-40B4-BE49-F238E27FC236}">
+                <a16:creationId xmlns:a16="http://schemas.microsoft.com/office/drawing/2014/main" id="{1682AFEE-1B98-FF1C-D82E-9461D7B13FCF}"/>
+              </a:ext>
+            </a:extLst>
+          </p:cNvPr>
+          <p:cNvSpPr>
+            <a:spLocks noGrp="1"/>
+          </p:cNvSpPr>
+          <p:nvPr>
+            <p:ph type="title"/>
+          </p:nvPr>
+        </p:nvSpPr>
+        <p:spPr/>
+        <p:txBody>
+          <a:bodyPr/>
+          <a:lstStyle/>
+          <a:p>
+            <a:r>
+              <a:rPr lang="en-US" dirty="0"/>
+              <a:t>HTTPS</a:t>
+            </a:r>
+          </a:p>
+        </p:txBody>
+      </p:sp>
+    </p:spTree>
+    <p:extLst>
+      <p:ext uri="{BB962C8B-B14F-4D97-AF65-F5344CB8AC3E}">
+        <p14:creationId xmlns:p14="http://schemas.microsoft.com/office/powerpoint/2010/main" val="3173341270"/>
+      </p:ext>
+    </p:extLst>
+  </p:cSld>
+  <p:clrMapOvr>
+    <a:masterClrMapping/>
+  </p:clrMapOvr>
+</p:sld>
+</file>
+
+<file path=ppt/slides/slide11.xml><?xml version="1.0" encoding="utf-8"?>
+<p:sld xmlns:a="http://schemas.openxmlformats.org/drawingml/2006/main" xmlns:r="http://schemas.openxmlformats.org/officeDocument/2006/relationships" xmlns:p="http://schemas.openxmlformats.org/presentationml/2006/main">
+  <p:cSld>
+    <p:spTree>
+      <p:nvGrpSpPr>
+        <p:cNvPr id="1" name=""/>
+        <p:cNvGrpSpPr/>
+        <p:nvPr/>
+      </p:nvGrpSpPr>
+      <p:grpSpPr>
+        <a:xfrm>
+          <a:off x="0" y="0"/>
+          <a:ext cx="0" cy="0"/>
+          <a:chOff x="0" y="0"/>
+          <a:chExt cx="0" cy="0"/>
+        </a:xfrm>
+      </p:grpSpPr>
+      <p:sp>
+        <p:nvSpPr>
+          <p:cNvPr id="3" name="Title 2">
+            <a:extLst>
+              <a:ext uri="{FF2B5EF4-FFF2-40B4-BE49-F238E27FC236}">
+                <a16:creationId xmlns:a16="http://schemas.microsoft.com/office/drawing/2014/main" id="{D06E6181-2F5B-EB89-52F4-1AB64D96E028}"/>
+              </a:ext>
+            </a:extLst>
+          </p:cNvPr>
+          <p:cNvSpPr>
+            <a:spLocks noGrp="1"/>
+          </p:cNvSpPr>
+          <p:nvPr>
+            <p:ph type="title"/>
+          </p:nvPr>
+        </p:nvSpPr>
+        <p:spPr/>
+        <p:txBody>
+          <a:bodyPr/>
+          <a:lstStyle/>
+          <a:p>
+            <a:r>
+              <a:rPr lang="en-US" dirty="0"/>
+              <a:t>HTTPS Setup</a:t>
+            </a:r>
+          </a:p>
+        </p:txBody>
+      </p:sp>
+      <p:pic>
+        <p:nvPicPr>
+          <p:cNvPr id="5" name="Picture 4">
+            <a:extLst>
+              <a:ext uri="{FF2B5EF4-FFF2-40B4-BE49-F238E27FC236}">
+                <a16:creationId xmlns:a16="http://schemas.microsoft.com/office/drawing/2014/main" id="{F88145C1-5DA8-3E57-7F65-AF7BDAD34413}"/>
+              </a:ext>
+            </a:extLst>
+          </p:cNvPr>
+          <p:cNvPicPr>
+            <a:picLocks noChangeAspect="1"/>
+          </p:cNvPicPr>
+          <p:nvPr/>
+        </p:nvPicPr>
+        <p:blipFill>
+          <a:blip r:embed="rId2"/>
+          <a:stretch>
+            <a:fillRect/>
+          </a:stretch>
+        </p:blipFill>
+        <p:spPr>
+          <a:xfrm>
+            <a:off x="555522" y="1296137"/>
+            <a:ext cx="4105499" cy="2016826"/>
+          </a:xfrm>
+          <a:prstGeom prst="rect">
+            <a:avLst/>
+          </a:prstGeom>
+        </p:spPr>
+      </p:pic>
+      <p:sp>
+        <p:nvSpPr>
+          <p:cNvPr id="8" name="TextBox 7">
+            <a:extLst>
+              <a:ext uri="{FF2B5EF4-FFF2-40B4-BE49-F238E27FC236}">
+                <a16:creationId xmlns:a16="http://schemas.microsoft.com/office/drawing/2014/main" id="{7602A619-0FD3-C2D4-9204-E097712B677D}"/>
+              </a:ext>
+            </a:extLst>
+          </p:cNvPr>
+          <p:cNvSpPr txBox="1"/>
+          <p:nvPr/>
+        </p:nvSpPr>
+        <p:spPr>
+          <a:xfrm>
+            <a:off x="4661021" y="1296137"/>
+            <a:ext cx="3681650" cy="2246769"/>
+          </a:xfrm>
+          <a:prstGeom prst="rect">
+            <a:avLst/>
+          </a:prstGeom>
+          <a:noFill/>
+        </p:spPr>
+        <p:txBody>
+          <a:bodyPr wrap="square" rtlCol="0">
+            <a:spAutoFit/>
+          </a:bodyPr>
+          <a:lstStyle/>
+          <a:p>
+            <a:r>
+              <a:rPr lang="en-US" dirty="0">
+                <a:solidFill>
+                  <a:schemeClr val="bg1"/>
+                </a:solidFill>
+              </a:rPr>
+              <a:t>properties/</a:t>
+            </a:r>
+            <a:r>
+              <a:rPr lang="en-US" dirty="0" err="1">
+                <a:solidFill>
+                  <a:schemeClr val="bg1"/>
+                </a:solidFill>
+              </a:rPr>
+              <a:t>launchsettings.json</a:t>
+            </a:r>
+            <a:r>
+              <a:rPr lang="en-US" dirty="0">
+                <a:solidFill>
+                  <a:schemeClr val="bg1"/>
+                </a:solidFill>
+              </a:rPr>
+              <a:t>: Ensure you have a HTTPS profile </a:t>
+            </a:r>
+            <a:br>
+              <a:rPr lang="en-US" dirty="0">
+                <a:solidFill>
+                  <a:schemeClr val="bg1"/>
+                </a:solidFill>
+              </a:rPr>
+            </a:br>
+            <a:br>
+              <a:rPr lang="en-US" dirty="0">
+                <a:solidFill>
+                  <a:schemeClr val="bg1"/>
+                </a:solidFill>
+              </a:rPr>
+            </a:br>
+            <a:r>
+              <a:rPr lang="en-US" dirty="0">
+                <a:solidFill>
+                  <a:schemeClr val="bg1"/>
+                </a:solidFill>
+              </a:rPr>
+              <a:t>This file is ONLY used in development. It will be ignored in prod!</a:t>
+            </a:r>
+          </a:p>
+          <a:p>
+            <a:endParaRPr lang="en-US" dirty="0">
+              <a:solidFill>
+                <a:schemeClr val="bg1"/>
+              </a:solidFill>
+            </a:endParaRPr>
+          </a:p>
+          <a:p>
+            <a:endParaRPr lang="en-US" dirty="0">
+              <a:solidFill>
+                <a:schemeClr val="bg1"/>
+              </a:solidFill>
+            </a:endParaRPr>
+          </a:p>
+          <a:p>
+            <a:endParaRPr lang="en-US" dirty="0">
+              <a:solidFill>
+                <a:schemeClr val="bg1"/>
+              </a:solidFill>
+            </a:endParaRPr>
+          </a:p>
+          <a:p>
+            <a:endParaRPr lang="en-US" dirty="0">
+              <a:solidFill>
+                <a:schemeClr val="bg1"/>
+              </a:solidFill>
+            </a:endParaRPr>
+          </a:p>
+          <a:p>
+            <a:endParaRPr lang="en-US" dirty="0">
+              <a:solidFill>
+                <a:schemeClr val="bg1"/>
+              </a:solidFill>
+            </a:endParaRPr>
+          </a:p>
+        </p:txBody>
+      </p:sp>
+      <p:pic>
+        <p:nvPicPr>
+          <p:cNvPr id="10" name="Picture 9">
+            <a:extLst>
+              <a:ext uri="{FF2B5EF4-FFF2-40B4-BE49-F238E27FC236}">
+                <a16:creationId xmlns:a16="http://schemas.microsoft.com/office/drawing/2014/main" id="{E58EB8E3-29B7-BD89-4BF1-C657B01EFFFF}"/>
+              </a:ext>
+            </a:extLst>
+          </p:cNvPr>
+          <p:cNvPicPr>
+            <a:picLocks noChangeAspect="1"/>
+          </p:cNvPicPr>
+          <p:nvPr/>
+        </p:nvPicPr>
+        <p:blipFill>
+          <a:blip r:embed="rId3"/>
+          <a:stretch>
+            <a:fillRect/>
+          </a:stretch>
+        </p:blipFill>
+        <p:spPr>
+          <a:xfrm>
+            <a:off x="1426534" y="3381788"/>
+            <a:ext cx="2171216" cy="1660044"/>
+          </a:xfrm>
+          <a:prstGeom prst="rect">
+            <a:avLst/>
+          </a:prstGeom>
+        </p:spPr>
+      </p:pic>
+      <p:sp>
+        <p:nvSpPr>
+          <p:cNvPr id="12" name="TextBox 11">
+            <a:extLst>
+              <a:ext uri="{FF2B5EF4-FFF2-40B4-BE49-F238E27FC236}">
+                <a16:creationId xmlns:a16="http://schemas.microsoft.com/office/drawing/2014/main" id="{8DE2F983-55D8-A9EF-233D-3DF51F0EE0A9}"/>
+              </a:ext>
+            </a:extLst>
+          </p:cNvPr>
+          <p:cNvSpPr txBox="1"/>
+          <p:nvPr/>
+        </p:nvSpPr>
+        <p:spPr>
+          <a:xfrm>
+            <a:off x="3717822" y="3454258"/>
+            <a:ext cx="4105499" cy="1600438"/>
+          </a:xfrm>
+          <a:prstGeom prst="rect">
+            <a:avLst/>
+          </a:prstGeom>
+          <a:noFill/>
+        </p:spPr>
+        <p:txBody>
+          <a:bodyPr wrap="square">
+            <a:spAutoFit/>
+          </a:bodyPr>
+          <a:lstStyle/>
+          <a:p>
+            <a:r>
+              <a:rPr lang="en-US" dirty="0">
+                <a:solidFill>
+                  <a:schemeClr val="bg1"/>
+                </a:solidFill>
+              </a:rPr>
+              <a:t>In </a:t>
+            </a:r>
+            <a:r>
+              <a:rPr lang="en-US" dirty="0" err="1">
+                <a:solidFill>
+                  <a:schemeClr val="bg1"/>
+                </a:solidFill>
+              </a:rPr>
+              <a:t>program.cs:UseHttpsRedirection</a:t>
+            </a:r>
+            <a:r>
+              <a:rPr lang="en-US" dirty="0">
+                <a:solidFill>
+                  <a:schemeClr val="bg1"/>
+                </a:solidFill>
+              </a:rPr>
+              <a:t>() will route all HTTP calls to HTTPS instead– order matters!</a:t>
+            </a:r>
+          </a:p>
+          <a:p>
+            <a:endParaRPr lang="en-US" dirty="0">
+              <a:solidFill>
+                <a:schemeClr val="bg1"/>
+              </a:solidFill>
+            </a:endParaRPr>
+          </a:p>
+          <a:p>
+            <a:r>
+              <a:rPr lang="en-US" dirty="0" err="1">
+                <a:solidFill>
+                  <a:schemeClr val="bg1"/>
+                </a:solidFill>
+              </a:rPr>
+              <a:t>UseHsts</a:t>
+            </a:r>
+            <a:r>
+              <a:rPr lang="en-US" dirty="0">
+                <a:solidFill>
+                  <a:schemeClr val="bg1"/>
+                </a:solidFill>
+              </a:rPr>
+              <a:t>() is for prod – it will tell the browser to remember that this site only uses HTTPS for future visits! – order matters!</a:t>
+            </a:r>
+          </a:p>
+          <a:p>
+            <a:r>
+              <a:rPr lang="en-US" dirty="0">
+                <a:solidFill>
+                  <a:schemeClr val="bg1"/>
+                </a:solidFill>
+              </a:rPr>
+              <a:t>(HTTP Strict Transport Security - HSTS)</a:t>
+            </a:r>
+          </a:p>
+        </p:txBody>
+      </p:sp>
+    </p:spTree>
+    <p:extLst>
+      <p:ext uri="{BB962C8B-B14F-4D97-AF65-F5344CB8AC3E}">
+        <p14:creationId xmlns:p14="http://schemas.microsoft.com/office/powerpoint/2010/main" val="1342648520"/>
+      </p:ext>
+    </p:extLst>
+  </p:cSld>
+  <p:clrMapOvr>
+    <a:masterClrMapping/>
+  </p:clrMapOvr>
+</p:sld>
+</file>
+
+<file path=ppt/slides/slide12.xml><?xml version="1.0" encoding="utf-8"?>
+<p:sld xmlns:a="http://schemas.openxmlformats.org/drawingml/2006/main" xmlns:r="http://schemas.openxmlformats.org/officeDocument/2006/relationships" xmlns:p="http://schemas.openxmlformats.org/presentationml/2006/main">
+  <p:cSld>
+    <p:spTree>
+      <p:nvGrpSpPr>
+        <p:cNvPr id="1" name=""/>
+        <p:cNvGrpSpPr/>
+        <p:nvPr/>
+      </p:nvGrpSpPr>
+      <p:grpSpPr>
+        <a:xfrm>
+          <a:off x="0" y="0"/>
+          <a:ext cx="0" cy="0"/>
+          <a:chOff x="0" y="0"/>
+          <a:chExt cx="0" cy="0"/>
+        </a:xfrm>
+      </p:grpSpPr>
+      <p:sp>
+        <p:nvSpPr>
+          <p:cNvPr id="3" name="Title 2">
+            <a:extLst>
+              <a:ext uri="{FF2B5EF4-FFF2-40B4-BE49-F238E27FC236}">
+                <a16:creationId xmlns:a16="http://schemas.microsoft.com/office/drawing/2014/main" id="{3A4A8990-9D76-F01F-3F32-72C93E5EFA00}"/>
+              </a:ext>
+            </a:extLst>
+          </p:cNvPr>
+          <p:cNvSpPr>
+            <a:spLocks noGrp="1"/>
+          </p:cNvSpPr>
+          <p:nvPr>
+            <p:ph type="title"/>
+          </p:nvPr>
+        </p:nvSpPr>
+        <p:spPr/>
+        <p:txBody>
+          <a:bodyPr/>
+          <a:lstStyle/>
+          <a:p>
+            <a:r>
+              <a:rPr lang="en-US" dirty="0"/>
+              <a:t>HTTPS Setup</a:t>
+            </a:r>
+          </a:p>
+        </p:txBody>
+      </p:sp>
+      <p:pic>
+        <p:nvPicPr>
+          <p:cNvPr id="5" name="Picture 4">
+            <a:extLst>
+              <a:ext uri="{FF2B5EF4-FFF2-40B4-BE49-F238E27FC236}">
+                <a16:creationId xmlns:a16="http://schemas.microsoft.com/office/drawing/2014/main" id="{2F178C6E-8017-D1CE-4C64-D144BC72A95A}"/>
+              </a:ext>
+            </a:extLst>
+          </p:cNvPr>
+          <p:cNvPicPr>
+            <a:picLocks noChangeAspect="1"/>
+          </p:cNvPicPr>
+          <p:nvPr/>
+        </p:nvPicPr>
+        <p:blipFill>
+          <a:blip r:embed="rId2"/>
+          <a:stretch>
+            <a:fillRect/>
+          </a:stretch>
+        </p:blipFill>
+        <p:spPr>
+          <a:xfrm>
+            <a:off x="904015" y="1273277"/>
+            <a:ext cx="2954134" cy="3678494"/>
+          </a:xfrm>
+          <a:prstGeom prst="rect">
+            <a:avLst/>
+          </a:prstGeom>
+        </p:spPr>
+      </p:pic>
+      <p:sp>
+        <p:nvSpPr>
+          <p:cNvPr id="9" name="TextBox 8">
+            <a:extLst>
+              <a:ext uri="{FF2B5EF4-FFF2-40B4-BE49-F238E27FC236}">
+                <a16:creationId xmlns:a16="http://schemas.microsoft.com/office/drawing/2014/main" id="{2A512048-1E6A-F4CF-2A5B-5B210ADA4F0C}"/>
+              </a:ext>
+            </a:extLst>
+          </p:cNvPr>
+          <p:cNvSpPr txBox="1"/>
+          <p:nvPr/>
+        </p:nvSpPr>
+        <p:spPr>
+          <a:xfrm>
+            <a:off x="4031226" y="1556087"/>
+            <a:ext cx="4596580" cy="2031325"/>
+          </a:xfrm>
+          <a:prstGeom prst="rect">
+            <a:avLst/>
+          </a:prstGeom>
+          <a:noFill/>
+        </p:spPr>
+        <p:txBody>
+          <a:bodyPr wrap="square" rtlCol="0">
+            <a:spAutoFit/>
+          </a:bodyPr>
+          <a:lstStyle/>
+          <a:p>
+            <a:r>
+              <a:rPr lang="en-US" dirty="0">
+                <a:solidFill>
+                  <a:schemeClr val="bg1"/>
+                </a:solidFill>
+              </a:rPr>
+              <a:t>Prod setup only</a:t>
+            </a:r>
+          </a:p>
+          <a:p>
+            <a:endParaRPr lang="en-US" dirty="0">
+              <a:solidFill>
+                <a:schemeClr val="bg1"/>
+              </a:solidFill>
+            </a:endParaRPr>
+          </a:p>
+          <a:p>
+            <a:r>
+              <a:rPr lang="en-US" dirty="0">
+                <a:solidFill>
+                  <a:schemeClr val="bg1"/>
+                </a:solidFill>
+              </a:rPr>
+              <a:t>In </a:t>
+            </a:r>
+            <a:r>
+              <a:rPr lang="en-US" dirty="0" err="1">
+                <a:solidFill>
+                  <a:schemeClr val="bg1"/>
+                </a:solidFill>
+              </a:rPr>
+              <a:t>appsettings.json</a:t>
+            </a:r>
+            <a:r>
+              <a:rPr lang="en-US" dirty="0">
+                <a:solidFill>
+                  <a:schemeClr val="bg1"/>
+                </a:solidFill>
+              </a:rPr>
+              <a:t>:</a:t>
+            </a:r>
+          </a:p>
+          <a:p>
+            <a:endParaRPr lang="en-US" dirty="0">
+              <a:solidFill>
+                <a:schemeClr val="bg1"/>
+              </a:solidFill>
+            </a:endParaRPr>
+          </a:p>
+          <a:p>
+            <a:r>
+              <a:rPr lang="en-US" dirty="0">
+                <a:solidFill>
+                  <a:schemeClr val="bg1"/>
+                </a:solidFill>
+              </a:rPr>
+              <a:t>We set our </a:t>
+            </a:r>
+            <a:r>
+              <a:rPr lang="en-US" dirty="0" err="1">
+                <a:solidFill>
+                  <a:schemeClr val="bg1"/>
+                </a:solidFill>
+              </a:rPr>
+              <a:t>url</a:t>
+            </a:r>
+            <a:r>
+              <a:rPr lang="en-US" dirty="0">
+                <a:solidFill>
+                  <a:schemeClr val="bg1"/>
+                </a:solidFill>
+              </a:rPr>
+              <a:t> </a:t>
+            </a:r>
+            <a:r>
+              <a:rPr lang="en-US" dirty="0" err="1">
+                <a:solidFill>
+                  <a:schemeClr val="bg1"/>
+                </a:solidFill>
+              </a:rPr>
+              <a:t>ip</a:t>
+            </a:r>
+            <a:r>
+              <a:rPr lang="en-US" dirty="0">
+                <a:solidFill>
+                  <a:schemeClr val="bg1"/>
+                </a:solidFill>
+              </a:rPr>
+              <a:t> + https port and provide a path to our downloaded certificate </a:t>
+            </a:r>
+          </a:p>
+          <a:p>
+            <a:endParaRPr lang="en-US" dirty="0">
+              <a:solidFill>
+                <a:schemeClr val="bg1"/>
+              </a:solidFill>
+            </a:endParaRPr>
+          </a:p>
+          <a:p>
+            <a:r>
+              <a:rPr lang="en-US" dirty="0">
+                <a:solidFill>
+                  <a:schemeClr val="bg1"/>
+                </a:solidFill>
+              </a:rPr>
+              <a:t>Certificate .</a:t>
+            </a:r>
+            <a:r>
+              <a:rPr lang="en-US" dirty="0" err="1">
+                <a:solidFill>
+                  <a:schemeClr val="bg1"/>
+                </a:solidFill>
+              </a:rPr>
+              <a:t>pfx</a:t>
+            </a:r>
+            <a:r>
+              <a:rPr lang="en-US" dirty="0">
+                <a:solidFill>
+                  <a:schemeClr val="bg1"/>
+                </a:solidFill>
+              </a:rPr>
+              <a:t> files and its password come from your certificate authority </a:t>
+            </a:r>
+          </a:p>
+        </p:txBody>
+      </p:sp>
+    </p:spTree>
+    <p:extLst>
+      <p:ext uri="{BB962C8B-B14F-4D97-AF65-F5344CB8AC3E}">
+        <p14:creationId xmlns:p14="http://schemas.microsoft.com/office/powerpoint/2010/main" val="2281300774"/>
+      </p:ext>
+    </p:extLst>
+  </p:cSld>
+  <p:clrMapOvr>
+    <a:masterClrMapping/>
+  </p:clrMapOvr>
+</p:sld>
+</file>
+
+<file path=ppt/slides/slide13.xml><?xml version="1.0" encoding="utf-8"?>
+<p:sld xmlns:a="http://schemas.openxmlformats.org/drawingml/2006/main" xmlns:r="http://schemas.openxmlformats.org/officeDocument/2006/relationships" xmlns:p="http://schemas.openxmlformats.org/presentationml/2006/main">
+  <p:cSld>
+    <p:spTree>
+      <p:nvGrpSpPr>
+        <p:cNvPr id="1" name=""/>
+        <p:cNvGrpSpPr/>
+        <p:nvPr/>
+      </p:nvGrpSpPr>
+      <p:grpSpPr>
+        <a:xfrm>
+          <a:off x="0" y="0"/>
+          <a:ext cx="0" cy="0"/>
+          <a:chOff x="0" y="0"/>
+          <a:chExt cx="0" cy="0"/>
+        </a:xfrm>
+      </p:grpSpPr>
+      <p:sp>
+        <p:nvSpPr>
+          <p:cNvPr id="3" name="Title 2">
+            <a:extLst>
+              <a:ext uri="{FF2B5EF4-FFF2-40B4-BE49-F238E27FC236}">
+                <a16:creationId xmlns:a16="http://schemas.microsoft.com/office/drawing/2014/main" id="{7901FFF0-AFD7-D805-C3F0-D84A908CE7AA}"/>
+              </a:ext>
+            </a:extLst>
+          </p:cNvPr>
+          <p:cNvSpPr>
+            <a:spLocks noGrp="1"/>
+          </p:cNvSpPr>
+          <p:nvPr>
+            <p:ph type="title"/>
+          </p:nvPr>
+        </p:nvSpPr>
+        <p:spPr/>
+        <p:txBody>
+          <a:bodyPr/>
+          <a:lstStyle/>
+          <a:p>
+            <a:r>
+              <a:rPr lang="en-US"/>
+              <a:t>Middleware</a:t>
+            </a:r>
+            <a:endParaRPr lang="en-US" dirty="0"/>
+          </a:p>
+        </p:txBody>
+      </p:sp>
+      <p:sp>
+        <p:nvSpPr>
+          <p:cNvPr id="5" name="TextBox 4">
+            <a:extLst>
+              <a:ext uri="{FF2B5EF4-FFF2-40B4-BE49-F238E27FC236}">
+                <a16:creationId xmlns:a16="http://schemas.microsoft.com/office/drawing/2014/main" id="{85C4B9AB-AC93-3B09-FB0F-4F720B51B62B}"/>
+              </a:ext>
+            </a:extLst>
+          </p:cNvPr>
+          <p:cNvSpPr txBox="1"/>
+          <p:nvPr/>
+        </p:nvSpPr>
+        <p:spPr>
+          <a:xfrm>
+            <a:off x="-291537" y="1971751"/>
+            <a:ext cx="5026742" cy="2462213"/>
+          </a:xfrm>
+          <a:prstGeom prst="rect">
+            <a:avLst/>
+          </a:prstGeom>
+          <a:noFill/>
+        </p:spPr>
+        <p:txBody>
+          <a:bodyPr wrap="square">
+            <a:spAutoFit/>
+          </a:bodyPr>
+          <a:lstStyle/>
+          <a:p>
+            <a:pPr algn="ctr"/>
+            <a:r>
+              <a:rPr lang="en-US" dirty="0">
+                <a:solidFill>
+                  <a:schemeClr val="bg1"/>
+                </a:solidFill>
+              </a:rPr>
+              <a:t>HTTP Request</a:t>
+            </a:r>
+            <a:br>
+              <a:rPr lang="en-US" dirty="0">
+                <a:solidFill>
+                  <a:schemeClr val="bg1"/>
+                </a:solidFill>
+              </a:rPr>
+            </a:br>
+            <a:r>
+              <a:rPr lang="en-US" dirty="0">
+                <a:solidFill>
+                  <a:schemeClr val="bg1"/>
+                </a:solidFill>
+              </a:rPr>
+              <a:t>↓</a:t>
+            </a:r>
+            <a:br>
+              <a:rPr lang="en-US" dirty="0">
+                <a:solidFill>
+                  <a:schemeClr val="bg1"/>
+                </a:solidFill>
+              </a:rPr>
+            </a:br>
+            <a:r>
+              <a:rPr lang="en-US" dirty="0">
+                <a:solidFill>
+                  <a:schemeClr val="bg1"/>
+                </a:solidFill>
+              </a:rPr>
+              <a:t>Middleware A</a:t>
+            </a:r>
+            <a:br>
+              <a:rPr lang="en-US" dirty="0">
+                <a:solidFill>
+                  <a:schemeClr val="bg1"/>
+                </a:solidFill>
+              </a:rPr>
+            </a:br>
+            <a:r>
+              <a:rPr lang="en-US" dirty="0">
+                <a:solidFill>
+                  <a:schemeClr val="bg1"/>
+                </a:solidFill>
+              </a:rPr>
+              <a:t>↓</a:t>
+            </a:r>
+            <a:br>
+              <a:rPr lang="en-US" dirty="0">
+                <a:solidFill>
+                  <a:schemeClr val="bg1"/>
+                </a:solidFill>
+              </a:rPr>
+            </a:br>
+            <a:r>
+              <a:rPr lang="en-US" dirty="0">
+                <a:solidFill>
+                  <a:schemeClr val="bg1"/>
+                </a:solidFill>
+              </a:rPr>
+              <a:t>Middleware B</a:t>
+            </a:r>
+            <a:br>
+              <a:rPr lang="en-US" dirty="0">
+                <a:solidFill>
+                  <a:schemeClr val="bg1"/>
+                </a:solidFill>
+              </a:rPr>
+            </a:br>
+            <a:r>
+              <a:rPr lang="en-US" dirty="0">
+                <a:solidFill>
+                  <a:schemeClr val="bg1"/>
+                </a:solidFill>
+              </a:rPr>
+              <a:t>↓</a:t>
+            </a:r>
+            <a:br>
+              <a:rPr lang="en-US" dirty="0">
+                <a:solidFill>
+                  <a:schemeClr val="bg1"/>
+                </a:solidFill>
+              </a:rPr>
+            </a:br>
+            <a:r>
+              <a:rPr lang="en-US" dirty="0">
+                <a:solidFill>
+                  <a:schemeClr val="bg1"/>
+                </a:solidFill>
+              </a:rPr>
+              <a:t>Middleware C</a:t>
+            </a:r>
+            <a:br>
+              <a:rPr lang="en-US" dirty="0">
+                <a:solidFill>
+                  <a:schemeClr val="bg1"/>
+                </a:solidFill>
+              </a:rPr>
+            </a:br>
+            <a:r>
+              <a:rPr lang="en-US" dirty="0">
+                <a:solidFill>
+                  <a:schemeClr val="bg1"/>
+                </a:solidFill>
+              </a:rPr>
+              <a:t>↓</a:t>
+            </a:r>
+            <a:br>
+              <a:rPr lang="en-US" dirty="0">
+                <a:solidFill>
+                  <a:schemeClr val="bg1"/>
+                </a:solidFill>
+              </a:rPr>
+            </a:br>
+            <a:r>
+              <a:rPr lang="en-US" dirty="0">
+                <a:solidFill>
+                  <a:schemeClr val="bg1"/>
+                </a:solidFill>
+              </a:rPr>
+              <a:t>Endpoint (Controller/API)</a:t>
+            </a:r>
+            <a:br>
+              <a:rPr lang="en-US" dirty="0">
+                <a:solidFill>
+                  <a:schemeClr val="bg1"/>
+                </a:solidFill>
+              </a:rPr>
+            </a:br>
+            <a:r>
+              <a:rPr lang="en-US" dirty="0">
+                <a:solidFill>
+                  <a:schemeClr val="bg1"/>
+                </a:solidFill>
+              </a:rPr>
+              <a:t>↑</a:t>
+            </a:r>
+            <a:br>
+              <a:rPr lang="en-US" dirty="0">
+                <a:solidFill>
+                  <a:schemeClr val="bg1"/>
+                </a:solidFill>
+              </a:rPr>
+            </a:br>
+            <a:r>
+              <a:rPr lang="en-US" dirty="0">
+                <a:solidFill>
+                  <a:schemeClr val="bg1"/>
+                </a:solidFill>
+              </a:rPr>
+              <a:t>Response travels back through middleware</a:t>
+            </a:r>
+          </a:p>
+        </p:txBody>
+      </p:sp>
+      <p:sp>
+        <p:nvSpPr>
+          <p:cNvPr id="6" name="TextBox 5">
+            <a:extLst>
+              <a:ext uri="{FF2B5EF4-FFF2-40B4-BE49-F238E27FC236}">
+                <a16:creationId xmlns:a16="http://schemas.microsoft.com/office/drawing/2014/main" id="{11EC9AA6-A565-0467-92F8-190A08037371}"/>
+              </a:ext>
+            </a:extLst>
+          </p:cNvPr>
+          <p:cNvSpPr txBox="1"/>
+          <p:nvPr/>
+        </p:nvSpPr>
+        <p:spPr>
+          <a:xfrm>
+            <a:off x="1170232" y="932000"/>
+            <a:ext cx="6803536" cy="738664"/>
+          </a:xfrm>
+          <a:prstGeom prst="rect">
+            <a:avLst/>
+          </a:prstGeom>
+          <a:noFill/>
+        </p:spPr>
+        <p:txBody>
+          <a:bodyPr wrap="square" rtlCol="0">
+            <a:spAutoFit/>
+          </a:bodyPr>
+          <a:lstStyle/>
+          <a:p>
+            <a:r>
+              <a:rPr lang="en-US" dirty="0">
+                <a:solidFill>
+                  <a:schemeClr val="bg1"/>
+                </a:solidFill>
+              </a:rPr>
+              <a:t>Middleware sits in the HTTP request pipeline and may inspect the request, modify the request, stop the request entirely, call other middleware, or inspect or modify the response on the way back out.</a:t>
+            </a:r>
+          </a:p>
+        </p:txBody>
+      </p:sp>
+      <p:sp>
+        <p:nvSpPr>
+          <p:cNvPr id="8" name="TextBox 7">
+            <a:extLst>
+              <a:ext uri="{FF2B5EF4-FFF2-40B4-BE49-F238E27FC236}">
+                <a16:creationId xmlns:a16="http://schemas.microsoft.com/office/drawing/2014/main" id="{A24E1E3E-5D86-2522-CE0C-E4B1D8FF28E3}"/>
+              </a:ext>
+            </a:extLst>
+          </p:cNvPr>
+          <p:cNvSpPr txBox="1"/>
+          <p:nvPr/>
+        </p:nvSpPr>
+        <p:spPr>
+          <a:xfrm>
+            <a:off x="4386416" y="1891100"/>
+            <a:ext cx="4246306" cy="2893100"/>
+          </a:xfrm>
+          <a:prstGeom prst="rect">
+            <a:avLst/>
+          </a:prstGeom>
+          <a:noFill/>
+        </p:spPr>
+        <p:txBody>
+          <a:bodyPr wrap="square">
+            <a:spAutoFit/>
+          </a:bodyPr>
+          <a:lstStyle/>
+          <a:p>
+            <a:r>
+              <a:rPr lang="en-US" dirty="0">
+                <a:solidFill>
+                  <a:schemeClr val="bg1"/>
+                </a:solidFill>
+              </a:rPr>
+              <a:t>var builder = </a:t>
+            </a:r>
+            <a:r>
+              <a:rPr lang="en-US" dirty="0" err="1">
+                <a:solidFill>
+                  <a:schemeClr val="bg1"/>
+                </a:solidFill>
+              </a:rPr>
+              <a:t>WebApplication.CreateBuilder</a:t>
+            </a:r>
+            <a:r>
+              <a:rPr lang="en-US" dirty="0">
+                <a:solidFill>
+                  <a:schemeClr val="bg1"/>
+                </a:solidFill>
+              </a:rPr>
+              <a:t>(</a:t>
+            </a:r>
+            <a:r>
+              <a:rPr lang="en-US" dirty="0" err="1">
+                <a:solidFill>
+                  <a:schemeClr val="bg1"/>
+                </a:solidFill>
+              </a:rPr>
+              <a:t>args</a:t>
+            </a:r>
+            <a:r>
+              <a:rPr lang="en-US" dirty="0">
+                <a:solidFill>
+                  <a:schemeClr val="bg1"/>
+                </a:solidFill>
+              </a:rPr>
+              <a:t>);</a:t>
+            </a:r>
+          </a:p>
+          <a:p>
+            <a:endParaRPr lang="en-US" dirty="0">
+              <a:solidFill>
+                <a:schemeClr val="bg1"/>
+              </a:solidFill>
+            </a:endParaRPr>
+          </a:p>
+          <a:p>
+            <a:r>
+              <a:rPr lang="en-US" dirty="0">
+                <a:solidFill>
+                  <a:schemeClr val="bg1"/>
+                </a:solidFill>
+              </a:rPr>
+              <a:t>var app = </a:t>
+            </a:r>
+            <a:r>
+              <a:rPr lang="en-US" dirty="0" err="1">
+                <a:solidFill>
+                  <a:schemeClr val="bg1"/>
+                </a:solidFill>
+              </a:rPr>
+              <a:t>builder.Build</a:t>
+            </a:r>
+            <a:r>
+              <a:rPr lang="en-US" dirty="0">
+                <a:solidFill>
+                  <a:schemeClr val="bg1"/>
+                </a:solidFill>
+              </a:rPr>
+              <a:t>();</a:t>
+            </a:r>
+          </a:p>
+          <a:p>
+            <a:endParaRPr lang="en-US" dirty="0">
+              <a:solidFill>
+                <a:schemeClr val="bg1"/>
+              </a:solidFill>
+            </a:endParaRPr>
+          </a:p>
+          <a:p>
+            <a:r>
+              <a:rPr lang="en-US" dirty="0" err="1">
+                <a:solidFill>
+                  <a:schemeClr val="bg1"/>
+                </a:solidFill>
+              </a:rPr>
+              <a:t>app.UseHttpsRedirection</a:t>
+            </a:r>
+            <a:r>
+              <a:rPr lang="en-US" dirty="0">
+                <a:solidFill>
+                  <a:schemeClr val="bg1"/>
+                </a:solidFill>
+              </a:rPr>
+              <a:t>();</a:t>
+            </a:r>
+          </a:p>
+          <a:p>
+            <a:endParaRPr lang="en-US" dirty="0">
+              <a:solidFill>
+                <a:schemeClr val="bg1"/>
+              </a:solidFill>
+            </a:endParaRPr>
+          </a:p>
+          <a:p>
+            <a:r>
+              <a:rPr lang="en-US" dirty="0" err="1">
+                <a:solidFill>
+                  <a:schemeClr val="bg1"/>
+                </a:solidFill>
+              </a:rPr>
+              <a:t>app.UseAuthentication</a:t>
+            </a:r>
+            <a:r>
+              <a:rPr lang="en-US" dirty="0">
+                <a:solidFill>
+                  <a:schemeClr val="bg1"/>
+                </a:solidFill>
+              </a:rPr>
+              <a:t>();</a:t>
+            </a:r>
+          </a:p>
+          <a:p>
+            <a:endParaRPr lang="en-US" dirty="0">
+              <a:solidFill>
+                <a:schemeClr val="bg1"/>
+              </a:solidFill>
+            </a:endParaRPr>
+          </a:p>
+          <a:p>
+            <a:r>
+              <a:rPr lang="en-US" dirty="0" err="1">
+                <a:solidFill>
+                  <a:schemeClr val="bg1"/>
+                </a:solidFill>
+              </a:rPr>
+              <a:t>app.UseAuthorization</a:t>
+            </a:r>
+            <a:r>
+              <a:rPr lang="en-US" dirty="0">
+                <a:solidFill>
+                  <a:schemeClr val="bg1"/>
+                </a:solidFill>
+              </a:rPr>
+              <a:t>();</a:t>
+            </a:r>
+          </a:p>
+          <a:p>
+            <a:endParaRPr lang="en-US" dirty="0">
+              <a:solidFill>
+                <a:schemeClr val="bg1"/>
+              </a:solidFill>
+            </a:endParaRPr>
+          </a:p>
+          <a:p>
+            <a:r>
+              <a:rPr lang="en-US" dirty="0" err="1">
+                <a:solidFill>
+                  <a:schemeClr val="bg1"/>
+                </a:solidFill>
+              </a:rPr>
+              <a:t>app.MapControllers</a:t>
+            </a:r>
+            <a:r>
+              <a:rPr lang="en-US" dirty="0">
+                <a:solidFill>
+                  <a:schemeClr val="bg1"/>
+                </a:solidFill>
+              </a:rPr>
+              <a:t>();</a:t>
+            </a:r>
+          </a:p>
+          <a:p>
+            <a:endParaRPr lang="en-US" dirty="0">
+              <a:solidFill>
+                <a:schemeClr val="bg1"/>
+              </a:solidFill>
+            </a:endParaRPr>
+          </a:p>
+          <a:p>
+            <a:r>
+              <a:rPr lang="en-US" dirty="0" err="1">
+                <a:solidFill>
+                  <a:schemeClr val="bg1"/>
+                </a:solidFill>
+              </a:rPr>
+              <a:t>app.Run</a:t>
+            </a:r>
+            <a:r>
+              <a:rPr lang="en-US" dirty="0">
+                <a:solidFill>
+                  <a:schemeClr val="bg1"/>
+                </a:solidFill>
+              </a:rPr>
+              <a:t>();</a:t>
+            </a:r>
+          </a:p>
+        </p:txBody>
+      </p:sp>
+    </p:spTree>
+    <p:extLst>
+      <p:ext uri="{BB962C8B-B14F-4D97-AF65-F5344CB8AC3E}">
+        <p14:creationId xmlns:p14="http://schemas.microsoft.com/office/powerpoint/2010/main" val="2799830083"/>
+      </p:ext>
+    </p:extLst>
+  </p:cSld>
+  <p:clrMapOvr>
+    <a:masterClrMapping/>
+  </p:clrMapOvr>
+</p:sld>
+</file>
+
+<file path=ppt/slides/slide14.xml><?xml version="1.0" encoding="utf-8"?>
+<p:sld xmlns:a="http://schemas.openxmlformats.org/drawingml/2006/main" xmlns:r="http://schemas.openxmlformats.org/officeDocument/2006/relationships" xmlns:p="http://schemas.openxmlformats.org/presentationml/2006/main">
+  <p:cSld>
+    <p:spTree>
+      <p:nvGrpSpPr>
+        <p:cNvPr id="1" name=""/>
+        <p:cNvGrpSpPr/>
+        <p:nvPr/>
+      </p:nvGrpSpPr>
+      <p:grpSpPr>
+        <a:xfrm>
+          <a:off x="0" y="0"/>
+          <a:ext cx="0" cy="0"/>
+          <a:chOff x="0" y="0"/>
+          <a:chExt cx="0" cy="0"/>
+        </a:xfrm>
+      </p:grpSpPr>
+      <p:sp>
+        <p:nvSpPr>
+          <p:cNvPr id="3" name="Title 2">
+            <a:extLst>
+              <a:ext uri="{FF2B5EF4-FFF2-40B4-BE49-F238E27FC236}">
+                <a16:creationId xmlns:a16="http://schemas.microsoft.com/office/drawing/2014/main" id="{AA1D0E13-69D1-8866-0673-1AB780FA6DD9}"/>
+              </a:ext>
+            </a:extLst>
+          </p:cNvPr>
+          <p:cNvSpPr>
+            <a:spLocks noGrp="1"/>
+          </p:cNvSpPr>
+          <p:nvPr>
+            <p:ph type="title"/>
+          </p:nvPr>
+        </p:nvSpPr>
+        <p:spPr/>
+        <p:txBody>
+          <a:bodyPr/>
+          <a:lstStyle/>
+          <a:p>
+            <a:r>
+              <a:rPr lang="en-US" dirty="0"/>
+              <a:t>Direct SQL Queries with EF Core</a:t>
+            </a:r>
+          </a:p>
+        </p:txBody>
+      </p:sp>
+      <p:pic>
+        <p:nvPicPr>
+          <p:cNvPr id="5" name="Picture 4">
+            <a:extLst>
+              <a:ext uri="{FF2B5EF4-FFF2-40B4-BE49-F238E27FC236}">
+                <a16:creationId xmlns:a16="http://schemas.microsoft.com/office/drawing/2014/main" id="{4CDF2F9A-03F6-4F30-D361-83F0B9679C86}"/>
+              </a:ext>
+            </a:extLst>
+          </p:cNvPr>
+          <p:cNvPicPr>
+            <a:picLocks noChangeAspect="1"/>
+          </p:cNvPicPr>
+          <p:nvPr/>
+        </p:nvPicPr>
+        <p:blipFill>
+          <a:blip r:embed="rId2"/>
+          <a:stretch>
+            <a:fillRect/>
+          </a:stretch>
+        </p:blipFill>
+        <p:spPr>
+          <a:xfrm>
+            <a:off x="2589391" y="1535390"/>
+            <a:ext cx="3984368" cy="1145794"/>
+          </a:xfrm>
+          <a:prstGeom prst="rect">
+            <a:avLst/>
+          </a:prstGeom>
+        </p:spPr>
+      </p:pic>
+      <p:pic>
+        <p:nvPicPr>
+          <p:cNvPr id="7" name="Picture 6">
+            <a:extLst>
+              <a:ext uri="{FF2B5EF4-FFF2-40B4-BE49-F238E27FC236}">
+                <a16:creationId xmlns:a16="http://schemas.microsoft.com/office/drawing/2014/main" id="{2A187B91-0187-C0E5-5EC6-C0DFC9466C46}"/>
+              </a:ext>
+            </a:extLst>
+          </p:cNvPr>
+          <p:cNvPicPr>
+            <a:picLocks noChangeAspect="1"/>
+          </p:cNvPicPr>
+          <p:nvPr/>
+        </p:nvPicPr>
+        <p:blipFill>
+          <a:blip r:embed="rId3"/>
+          <a:stretch>
+            <a:fillRect/>
+          </a:stretch>
+        </p:blipFill>
+        <p:spPr>
+          <a:xfrm>
+            <a:off x="2253949" y="3602050"/>
+            <a:ext cx="4636102" cy="760017"/>
+          </a:xfrm>
+          <a:prstGeom prst="rect">
+            <a:avLst/>
+          </a:prstGeom>
+        </p:spPr>
+      </p:pic>
+      <p:sp>
+        <p:nvSpPr>
+          <p:cNvPr id="8" name="TextBox 7">
+            <a:extLst>
+              <a:ext uri="{FF2B5EF4-FFF2-40B4-BE49-F238E27FC236}">
+                <a16:creationId xmlns:a16="http://schemas.microsoft.com/office/drawing/2014/main" id="{FF551E10-15EF-9828-441C-AA3EACEF2787}"/>
+              </a:ext>
+            </a:extLst>
+          </p:cNvPr>
+          <p:cNvSpPr txBox="1"/>
+          <p:nvPr/>
+        </p:nvSpPr>
+        <p:spPr>
+          <a:xfrm>
+            <a:off x="2290715" y="3294273"/>
+            <a:ext cx="4599336" cy="307777"/>
+          </a:xfrm>
+          <a:prstGeom prst="rect">
+            <a:avLst/>
+          </a:prstGeom>
+          <a:noFill/>
+        </p:spPr>
+        <p:txBody>
+          <a:bodyPr wrap="none" rtlCol="0">
+            <a:spAutoFit/>
+          </a:bodyPr>
+          <a:lstStyle/>
+          <a:p>
+            <a:r>
+              <a:rPr lang="en-US" dirty="0">
+                <a:solidFill>
+                  <a:schemeClr val="bg1"/>
+                </a:solidFill>
+              </a:rPr>
+              <a:t>You can also launch stored procedures that return data:</a:t>
+            </a:r>
+          </a:p>
+        </p:txBody>
+      </p:sp>
+    </p:spTree>
+    <p:extLst>
+      <p:ext uri="{BB962C8B-B14F-4D97-AF65-F5344CB8AC3E}">
+        <p14:creationId xmlns:p14="http://schemas.microsoft.com/office/powerpoint/2010/main" val="869769023"/>
+      </p:ext>
+    </p:extLst>
   </p:cSld>
   <p:clrMapOvr>
     <a:masterClrMapping/>
@@ -40153,8 +41526,8 @@
         </p:nvSpPr>
         <p:spPr>
           <a:xfrm>
-            <a:off x="437922" y="1907458"/>
-            <a:ext cx="2512226" cy="307777"/>
+            <a:off x="433006" y="1760902"/>
+            <a:ext cx="3986594" cy="523220"/>
           </a:xfrm>
           <a:prstGeom prst="rect">
             <a:avLst/>
@@ -40162,7 +41535,7 @@
           <a:noFill/>
         </p:spPr>
         <p:txBody>
-          <a:bodyPr wrap="none" rtlCol="0">
+          <a:bodyPr wrap="square" rtlCol="0">
             <a:spAutoFit/>
           </a:bodyPr>
           <a:lstStyle/>
@@ -40173,7 +41546,7 @@
                   <a:schemeClr val="bg1"/>
                 </a:solidFill>
               </a:rPr>
-              <a:t>Set the options to the builder:</a:t>
+              <a:t>Set the options to the builder (you can have more than one policy):</a:t>
             </a:r>
           </a:p>
         </p:txBody>

--- a/Resources-Notes-Ppts/ASP-NET-Identity/ASPNET_Identity.pptx
+++ b/Resources-Notes-Ppts/ASP-NET-Identity/ASPNET_Identity.pptx
@@ -5,7 +5,7 @@
     <p:sldMasterId id="2147483671" r:id="rId1"/>
   </p:sldMasterIdLst>
   <p:notesMasterIdLst>
-    <p:notesMasterId r:id="rId16"/>
+    <p:notesMasterId r:id="rId29"/>
   </p:notesMasterIdLst>
   <p:sldIdLst>
     <p:sldId id="256" r:id="rId2"/>
@@ -22,20 +22,33 @@
     <p:sldId id="269" r:id="rId13"/>
     <p:sldId id="270" r:id="rId14"/>
     <p:sldId id="271" r:id="rId15"/>
+    <p:sldId id="282" r:id="rId16"/>
+    <p:sldId id="272" r:id="rId17"/>
+    <p:sldId id="273" r:id="rId18"/>
+    <p:sldId id="274" r:id="rId19"/>
+    <p:sldId id="275" r:id="rId20"/>
+    <p:sldId id="276" r:id="rId21"/>
+    <p:sldId id="277" r:id="rId22"/>
+    <p:sldId id="278" r:id="rId23"/>
+    <p:sldId id="279" r:id="rId24"/>
+    <p:sldId id="280" r:id="rId25"/>
+    <p:sldId id="281" r:id="rId26"/>
+    <p:sldId id="283" r:id="rId27"/>
+    <p:sldId id="284" r:id="rId28"/>
   </p:sldIdLst>
   <p:sldSz cx="9144000" cy="5143500" type="screen16x9"/>
   <p:notesSz cx="6858000" cy="9144000"/>
   <p:embeddedFontLst>
     <p:embeddedFont>
       <p:font typeface="Hammersmith One" panose="02010703030501060504" pitchFamily="2" charset="0"/>
-      <p:regular r:id="rId17"/>
+      <p:regular r:id="rId30"/>
     </p:embeddedFont>
     <p:embeddedFont>
       <p:font typeface="Source Sans Pro" panose="020B0503030403020204" pitchFamily="34" charset="0"/>
-      <p:regular r:id="rId18"/>
-      <p:bold r:id="rId19"/>
-      <p:italic r:id="rId20"/>
-      <p:boldItalic r:id="rId21"/>
+      <p:regular r:id="rId31"/>
+      <p:bold r:id="rId32"/>
+      <p:italic r:id="rId33"/>
+      <p:boldItalic r:id="rId34"/>
     </p:embeddedFont>
   </p:embeddedFontLst>
   <p:defaultTextStyle>
@@ -19946,36 +19959,6 @@
                 </a:solidFill>
               </a:rPr>
               <a:t>ASP.NET</a:t>
-            </a:r>
-            <a:br>
-              <a:rPr lang="en" sz="4800" dirty="0">
-                <a:solidFill>
-                  <a:schemeClr val="accent3"/>
-                </a:solidFill>
-              </a:rPr>
-            </a:br>
-            <a:r>
-              <a:rPr lang="en" sz="4800" dirty="0">
-                <a:solidFill>
-                  <a:schemeClr val="accent3"/>
-                </a:solidFill>
-              </a:rPr>
-              <a:t>&amp;</a:t>
-            </a:r>
-            <a:br>
-              <a:rPr lang="en" sz="4800" dirty="0">
-                <a:solidFill>
-                  <a:schemeClr val="accent3"/>
-                </a:solidFill>
-              </a:rPr>
-            </a:br>
-            <a:r>
-              <a:rPr lang="en" sz="4800" dirty="0">
-                <a:solidFill>
-                  <a:schemeClr val="accent3"/>
-                </a:solidFill>
-              </a:rPr>
-              <a:t>Identity</a:t>
             </a:r>
             <a:endParaRPr sz="4800" dirty="0">
               <a:solidFill>
@@ -30430,6 +30413,835 @@
 </p:sld>
 </file>
 
+<file path=ppt/slides/slide15.xml><?xml version="1.0" encoding="utf-8"?>
+<p:sld xmlns:a="http://schemas.openxmlformats.org/drawingml/2006/main" xmlns:r="http://schemas.openxmlformats.org/officeDocument/2006/relationships" xmlns:p="http://schemas.openxmlformats.org/presentationml/2006/main">
+  <p:cSld>
+    <p:spTree>
+      <p:nvGrpSpPr>
+        <p:cNvPr id="1" name=""/>
+        <p:cNvGrpSpPr/>
+        <p:nvPr/>
+      </p:nvGrpSpPr>
+      <p:grpSpPr>
+        <a:xfrm>
+          <a:off x="0" y="0"/>
+          <a:ext cx="0" cy="0"/>
+          <a:chOff x="0" y="0"/>
+          <a:chExt cx="0" cy="0"/>
+        </a:xfrm>
+      </p:grpSpPr>
+      <p:sp>
+        <p:nvSpPr>
+          <p:cNvPr id="3" name="Title 2">
+            <a:extLst>
+              <a:ext uri="{FF2B5EF4-FFF2-40B4-BE49-F238E27FC236}">
+                <a16:creationId xmlns:a16="http://schemas.microsoft.com/office/drawing/2014/main" id="{52AC4DDB-E9AA-B4F7-861B-87DD37ED0F4E}"/>
+              </a:ext>
+            </a:extLst>
+          </p:cNvPr>
+          <p:cNvSpPr>
+            <a:spLocks noGrp="1"/>
+          </p:cNvSpPr>
+          <p:nvPr>
+            <p:ph type="title"/>
+          </p:nvPr>
+        </p:nvSpPr>
+        <p:spPr/>
+        <p:txBody>
+          <a:bodyPr/>
+          <a:lstStyle/>
+          <a:p>
+            <a:r>
+              <a:rPr lang="en-US" dirty="0"/>
+              <a:t>Change Tracking</a:t>
+            </a:r>
+          </a:p>
+        </p:txBody>
+      </p:sp>
+      <p:pic>
+        <p:nvPicPr>
+          <p:cNvPr id="5" name="Picture 4">
+            <a:extLst>
+              <a:ext uri="{FF2B5EF4-FFF2-40B4-BE49-F238E27FC236}">
+                <a16:creationId xmlns:a16="http://schemas.microsoft.com/office/drawing/2014/main" id="{089F2091-7D6B-BFC6-1C60-2B23610CEE41}"/>
+              </a:ext>
+            </a:extLst>
+          </p:cNvPr>
+          <p:cNvPicPr>
+            <a:picLocks noChangeAspect="1"/>
+          </p:cNvPicPr>
+          <p:nvPr/>
+        </p:nvPicPr>
+        <p:blipFill>
+          <a:blip r:embed="rId2"/>
+          <a:stretch>
+            <a:fillRect/>
+          </a:stretch>
+        </p:blipFill>
+        <p:spPr>
+          <a:xfrm>
+            <a:off x="1299754" y="2041772"/>
+            <a:ext cx="6563641" cy="1590897"/>
+          </a:xfrm>
+          <a:prstGeom prst="rect">
+            <a:avLst/>
+          </a:prstGeom>
+        </p:spPr>
+      </p:pic>
+      <p:sp>
+        <p:nvSpPr>
+          <p:cNvPr id="6" name="TextBox 5">
+            <a:extLst>
+              <a:ext uri="{FF2B5EF4-FFF2-40B4-BE49-F238E27FC236}">
+                <a16:creationId xmlns:a16="http://schemas.microsoft.com/office/drawing/2014/main" id="{A35FFA25-6869-AC3B-774A-9A163E6192F4}"/>
+              </a:ext>
+            </a:extLst>
+          </p:cNvPr>
+          <p:cNvSpPr txBox="1"/>
+          <p:nvPr/>
+        </p:nvSpPr>
+        <p:spPr>
+          <a:xfrm>
+            <a:off x="1280605" y="1733995"/>
+            <a:ext cx="662361" cy="307777"/>
+          </a:xfrm>
+          <a:prstGeom prst="rect">
+            <a:avLst/>
+          </a:prstGeom>
+          <a:noFill/>
+        </p:spPr>
+        <p:txBody>
+          <a:bodyPr wrap="none" rtlCol="0">
+            <a:spAutoFit/>
+          </a:bodyPr>
+          <a:lstStyle/>
+          <a:p>
+            <a:r>
+              <a:rPr lang="en-US" dirty="0">
+                <a:solidFill>
+                  <a:schemeClr val="bg1"/>
+                </a:solidFill>
+              </a:rPr>
+              <a:t>Repo:</a:t>
+            </a:r>
+          </a:p>
+        </p:txBody>
+      </p:sp>
+    </p:spTree>
+    <p:extLst>
+      <p:ext uri="{BB962C8B-B14F-4D97-AF65-F5344CB8AC3E}">
+        <p14:creationId xmlns:p14="http://schemas.microsoft.com/office/powerpoint/2010/main" val="240699387"/>
+      </p:ext>
+    </p:extLst>
+  </p:cSld>
+  <p:clrMapOvr>
+    <a:masterClrMapping/>
+  </p:clrMapOvr>
+</p:sld>
+</file>
+
+<file path=ppt/slides/slide16.xml><?xml version="1.0" encoding="utf-8"?>
+<p:sld xmlns:a="http://schemas.openxmlformats.org/drawingml/2006/main" xmlns:r="http://schemas.openxmlformats.org/officeDocument/2006/relationships" xmlns:p="http://schemas.openxmlformats.org/presentationml/2006/main">
+  <p:cSld>
+    <p:spTree>
+      <p:nvGrpSpPr>
+        <p:cNvPr id="1" name=""/>
+        <p:cNvGrpSpPr/>
+        <p:nvPr/>
+      </p:nvGrpSpPr>
+      <p:grpSpPr>
+        <a:xfrm>
+          <a:off x="0" y="0"/>
+          <a:ext cx="0" cy="0"/>
+          <a:chOff x="0" y="0"/>
+          <a:chExt cx="0" cy="0"/>
+        </a:xfrm>
+      </p:grpSpPr>
+      <p:sp>
+        <p:nvSpPr>
+          <p:cNvPr id="3" name="Title 2">
+            <a:extLst>
+              <a:ext uri="{FF2B5EF4-FFF2-40B4-BE49-F238E27FC236}">
+                <a16:creationId xmlns:a16="http://schemas.microsoft.com/office/drawing/2014/main" id="{55EEB698-1BAB-4F9D-FB97-9896A173E83E}"/>
+              </a:ext>
+            </a:extLst>
+          </p:cNvPr>
+          <p:cNvSpPr>
+            <a:spLocks noGrp="1"/>
+          </p:cNvSpPr>
+          <p:nvPr>
+            <p:ph type="title"/>
+          </p:nvPr>
+        </p:nvSpPr>
+        <p:spPr/>
+        <p:txBody>
+          <a:bodyPr/>
+          <a:lstStyle/>
+          <a:p>
+            <a:r>
+              <a:rPr lang="en-US" dirty="0"/>
+              <a:t>EF Core Data Annotations</a:t>
+            </a:r>
+          </a:p>
+        </p:txBody>
+      </p:sp>
+      <p:pic>
+        <p:nvPicPr>
+          <p:cNvPr id="5" name="Picture 4">
+            <a:extLst>
+              <a:ext uri="{FF2B5EF4-FFF2-40B4-BE49-F238E27FC236}">
+                <a16:creationId xmlns:a16="http://schemas.microsoft.com/office/drawing/2014/main" id="{C3A99C2D-B489-F44B-B6AE-6393CB29A60B}"/>
+              </a:ext>
+            </a:extLst>
+          </p:cNvPr>
+          <p:cNvPicPr>
+            <a:picLocks noChangeAspect="1"/>
+          </p:cNvPicPr>
+          <p:nvPr/>
+        </p:nvPicPr>
+        <p:blipFill>
+          <a:blip r:embed="rId2"/>
+          <a:stretch>
+            <a:fillRect/>
+          </a:stretch>
+        </p:blipFill>
+        <p:spPr>
+          <a:xfrm>
+            <a:off x="1317275" y="1160205"/>
+            <a:ext cx="2499809" cy="3486765"/>
+          </a:xfrm>
+          <a:prstGeom prst="rect">
+            <a:avLst/>
+          </a:prstGeom>
+        </p:spPr>
+      </p:pic>
+      <p:sp>
+        <p:nvSpPr>
+          <p:cNvPr id="6" name="TextBox 5">
+            <a:extLst>
+              <a:ext uri="{FF2B5EF4-FFF2-40B4-BE49-F238E27FC236}">
+                <a16:creationId xmlns:a16="http://schemas.microsoft.com/office/drawing/2014/main" id="{F386279D-AFA8-41E9-7A50-190DA057E526}"/>
+              </a:ext>
+            </a:extLst>
+          </p:cNvPr>
+          <p:cNvSpPr txBox="1"/>
+          <p:nvPr/>
+        </p:nvSpPr>
+        <p:spPr>
+          <a:xfrm>
+            <a:off x="4055806" y="2010696"/>
+            <a:ext cx="4114800" cy="1384995"/>
+          </a:xfrm>
+          <a:prstGeom prst="rect">
+            <a:avLst/>
+          </a:prstGeom>
+          <a:noFill/>
+        </p:spPr>
+        <p:txBody>
+          <a:bodyPr wrap="square" rtlCol="0">
+            <a:spAutoFit/>
+          </a:bodyPr>
+          <a:lstStyle/>
+          <a:p>
+            <a:r>
+              <a:rPr lang="en-US" dirty="0">
+                <a:solidFill>
+                  <a:schemeClr val="bg1"/>
+                </a:solidFill>
+              </a:rPr>
+              <a:t>Data Annotations allow us to declaratively set conditions on fields that will apply during migrations</a:t>
+            </a:r>
+          </a:p>
+          <a:p>
+            <a:endParaRPr lang="en-US" dirty="0">
+              <a:solidFill>
+                <a:schemeClr val="bg1"/>
+              </a:solidFill>
+            </a:endParaRPr>
+          </a:p>
+          <a:p>
+            <a:r>
+              <a:rPr lang="en-US" dirty="0">
+                <a:solidFill>
+                  <a:schemeClr val="bg1"/>
+                </a:solidFill>
+              </a:rPr>
+              <a:t>This is NOT a complete list of all annotations, only common ones</a:t>
+            </a:r>
+          </a:p>
+        </p:txBody>
+      </p:sp>
+      <p:sp>
+        <p:nvSpPr>
+          <p:cNvPr id="7" name="TextBox 6">
+            <a:extLst>
+              <a:ext uri="{FF2B5EF4-FFF2-40B4-BE49-F238E27FC236}">
+                <a16:creationId xmlns:a16="http://schemas.microsoft.com/office/drawing/2014/main" id="{89F16849-56BF-321F-F9E7-552A33AD68DA}"/>
+              </a:ext>
+            </a:extLst>
+          </p:cNvPr>
+          <p:cNvSpPr txBox="1"/>
+          <p:nvPr/>
+        </p:nvSpPr>
+        <p:spPr>
+          <a:xfrm>
+            <a:off x="1229033" y="892214"/>
+            <a:ext cx="721672" cy="307777"/>
+          </a:xfrm>
+          <a:prstGeom prst="rect">
+            <a:avLst/>
+          </a:prstGeom>
+          <a:noFill/>
+        </p:spPr>
+        <p:txBody>
+          <a:bodyPr wrap="none" rtlCol="0">
+            <a:spAutoFit/>
+          </a:bodyPr>
+          <a:lstStyle/>
+          <a:p>
+            <a:r>
+              <a:rPr lang="en-US" dirty="0">
+                <a:solidFill>
+                  <a:schemeClr val="bg1"/>
+                </a:solidFill>
+              </a:rPr>
+              <a:t>Model:</a:t>
+            </a:r>
+          </a:p>
+        </p:txBody>
+      </p:sp>
+    </p:spTree>
+    <p:extLst>
+      <p:ext uri="{BB962C8B-B14F-4D97-AF65-F5344CB8AC3E}">
+        <p14:creationId xmlns:p14="http://schemas.microsoft.com/office/powerpoint/2010/main" val="3897979909"/>
+      </p:ext>
+    </p:extLst>
+  </p:cSld>
+  <p:clrMapOvr>
+    <a:masterClrMapping/>
+  </p:clrMapOvr>
+</p:sld>
+</file>
+
+<file path=ppt/slides/slide17.xml><?xml version="1.0" encoding="utf-8"?>
+<p:sld xmlns:a="http://schemas.openxmlformats.org/drawingml/2006/main" xmlns:r="http://schemas.openxmlformats.org/officeDocument/2006/relationships" xmlns:p="http://schemas.openxmlformats.org/presentationml/2006/main">
+  <p:cSld>
+    <p:spTree>
+      <p:nvGrpSpPr>
+        <p:cNvPr id="1" name="">
+          <a:extLst>
+            <a:ext uri="{FF2B5EF4-FFF2-40B4-BE49-F238E27FC236}">
+              <a16:creationId xmlns:a16="http://schemas.microsoft.com/office/drawing/2014/main" id="{1D3F77A5-0BB7-34E0-7058-AFEDA5588AC8}"/>
+            </a:ext>
+          </a:extLst>
+        </p:cNvPr>
+        <p:cNvGrpSpPr/>
+        <p:nvPr/>
+      </p:nvGrpSpPr>
+      <p:grpSpPr>
+        <a:xfrm>
+          <a:off x="0" y="0"/>
+          <a:ext cx="0" cy="0"/>
+          <a:chOff x="0" y="0"/>
+          <a:chExt cx="0" cy="0"/>
+        </a:xfrm>
+      </p:grpSpPr>
+      <p:sp>
+        <p:nvSpPr>
+          <p:cNvPr id="3" name="Title 2">
+            <a:extLst>
+              <a:ext uri="{FF2B5EF4-FFF2-40B4-BE49-F238E27FC236}">
+                <a16:creationId xmlns:a16="http://schemas.microsoft.com/office/drawing/2014/main" id="{FBD08787-2BC2-86AD-37C3-E215C6FF12C5}"/>
+              </a:ext>
+            </a:extLst>
+          </p:cNvPr>
+          <p:cNvSpPr>
+            <a:spLocks noGrp="1"/>
+          </p:cNvSpPr>
+          <p:nvPr>
+            <p:ph type="title"/>
+          </p:nvPr>
+        </p:nvSpPr>
+        <p:spPr/>
+        <p:txBody>
+          <a:bodyPr/>
+          <a:lstStyle/>
+          <a:p>
+            <a:r>
+              <a:rPr lang="en-US" dirty="0"/>
+              <a:t>Data Annotations – Relationships &amp; Navigation Properties</a:t>
+            </a:r>
+          </a:p>
+        </p:txBody>
+      </p:sp>
+      <p:pic>
+        <p:nvPicPr>
+          <p:cNvPr id="5" name="Picture 4">
+            <a:extLst>
+              <a:ext uri="{FF2B5EF4-FFF2-40B4-BE49-F238E27FC236}">
+                <a16:creationId xmlns:a16="http://schemas.microsoft.com/office/drawing/2014/main" id="{B14C66B3-2326-3182-DD63-6560847AD302}"/>
+              </a:ext>
+            </a:extLst>
+          </p:cNvPr>
+          <p:cNvPicPr>
+            <a:picLocks noChangeAspect="1"/>
+          </p:cNvPicPr>
+          <p:nvPr/>
+        </p:nvPicPr>
+        <p:blipFill>
+          <a:blip r:embed="rId2"/>
+          <a:stretch>
+            <a:fillRect/>
+          </a:stretch>
+        </p:blipFill>
+        <p:spPr>
+          <a:xfrm>
+            <a:off x="1381185" y="1907456"/>
+            <a:ext cx="2217421" cy="3092887"/>
+          </a:xfrm>
+          <a:prstGeom prst="rect">
+            <a:avLst/>
+          </a:prstGeom>
+        </p:spPr>
+      </p:pic>
+      <p:pic>
+        <p:nvPicPr>
+          <p:cNvPr id="4" name="Picture 3">
+            <a:extLst>
+              <a:ext uri="{FF2B5EF4-FFF2-40B4-BE49-F238E27FC236}">
+                <a16:creationId xmlns:a16="http://schemas.microsoft.com/office/drawing/2014/main" id="{DEDEA23C-1D4C-7DB2-2828-0F8C8FD40EBB}"/>
+              </a:ext>
+            </a:extLst>
+          </p:cNvPr>
+          <p:cNvPicPr>
+            <a:picLocks noChangeAspect="1"/>
+          </p:cNvPicPr>
+          <p:nvPr/>
+        </p:nvPicPr>
+        <p:blipFill>
+          <a:blip r:embed="rId3"/>
+          <a:stretch>
+            <a:fillRect/>
+          </a:stretch>
+        </p:blipFill>
+        <p:spPr>
+          <a:xfrm>
+            <a:off x="4034243" y="1907456"/>
+            <a:ext cx="3847676" cy="3056187"/>
+          </a:xfrm>
+          <a:prstGeom prst="rect">
+            <a:avLst/>
+          </a:prstGeom>
+        </p:spPr>
+      </p:pic>
+      <p:sp>
+        <p:nvSpPr>
+          <p:cNvPr id="7" name="TextBox 6">
+            <a:extLst>
+              <a:ext uri="{FF2B5EF4-FFF2-40B4-BE49-F238E27FC236}">
+                <a16:creationId xmlns:a16="http://schemas.microsoft.com/office/drawing/2014/main" id="{0AA9E76E-201D-3A66-E7F6-3E0CBE1FB397}"/>
+              </a:ext>
+            </a:extLst>
+          </p:cNvPr>
+          <p:cNvSpPr txBox="1"/>
+          <p:nvPr/>
+        </p:nvSpPr>
+        <p:spPr>
+          <a:xfrm>
+            <a:off x="3589155" y="1465007"/>
+            <a:ext cx="1984839" cy="307777"/>
+          </a:xfrm>
+          <a:prstGeom prst="rect">
+            <a:avLst/>
+          </a:prstGeom>
+          <a:noFill/>
+        </p:spPr>
+        <p:txBody>
+          <a:bodyPr wrap="none" rtlCol="0">
+            <a:spAutoFit/>
+          </a:bodyPr>
+          <a:lstStyle/>
+          <a:p>
+            <a:r>
+              <a:rPr lang="en-US" dirty="0">
+                <a:solidFill>
+                  <a:schemeClr val="bg1"/>
+                </a:solidFill>
+              </a:rPr>
+              <a:t>1 to many relationship:</a:t>
+            </a:r>
+          </a:p>
+        </p:txBody>
+      </p:sp>
+    </p:spTree>
+    <p:extLst>
+      <p:ext uri="{BB962C8B-B14F-4D97-AF65-F5344CB8AC3E}">
+        <p14:creationId xmlns:p14="http://schemas.microsoft.com/office/powerpoint/2010/main" val="3150180694"/>
+      </p:ext>
+    </p:extLst>
+  </p:cSld>
+  <p:clrMapOvr>
+    <a:masterClrMapping/>
+  </p:clrMapOvr>
+</p:sld>
+</file>
+
+<file path=ppt/slides/slide18.xml><?xml version="1.0" encoding="utf-8"?>
+<p:sld xmlns:a="http://schemas.openxmlformats.org/drawingml/2006/main" xmlns:r="http://schemas.openxmlformats.org/officeDocument/2006/relationships" xmlns:p="http://schemas.openxmlformats.org/presentationml/2006/main">
+  <p:cSld>
+    <p:spTree>
+      <p:nvGrpSpPr>
+        <p:cNvPr id="1" name="">
+          <a:extLst>
+            <a:ext uri="{FF2B5EF4-FFF2-40B4-BE49-F238E27FC236}">
+              <a16:creationId xmlns:a16="http://schemas.microsoft.com/office/drawing/2014/main" id="{867A042A-ADB4-E83C-9592-E50CBFBF8F77}"/>
+            </a:ext>
+          </a:extLst>
+        </p:cNvPr>
+        <p:cNvGrpSpPr/>
+        <p:nvPr/>
+      </p:nvGrpSpPr>
+      <p:grpSpPr>
+        <a:xfrm>
+          <a:off x="0" y="0"/>
+          <a:ext cx="0" cy="0"/>
+          <a:chOff x="0" y="0"/>
+          <a:chExt cx="0" cy="0"/>
+        </a:xfrm>
+      </p:grpSpPr>
+      <p:sp>
+        <p:nvSpPr>
+          <p:cNvPr id="3" name="Title 2">
+            <a:extLst>
+              <a:ext uri="{FF2B5EF4-FFF2-40B4-BE49-F238E27FC236}">
+                <a16:creationId xmlns:a16="http://schemas.microsoft.com/office/drawing/2014/main" id="{C8D1B0D7-4D08-4965-85B2-8A3C492F559C}"/>
+              </a:ext>
+            </a:extLst>
+          </p:cNvPr>
+          <p:cNvSpPr>
+            <a:spLocks noGrp="1"/>
+          </p:cNvSpPr>
+          <p:nvPr>
+            <p:ph type="title"/>
+          </p:nvPr>
+        </p:nvSpPr>
+        <p:spPr/>
+        <p:txBody>
+          <a:bodyPr/>
+          <a:lstStyle/>
+          <a:p>
+            <a:r>
+              <a:rPr lang="en-US" dirty="0"/>
+              <a:t>Data Annotations – Relationships &amp; Navigation Properties</a:t>
+            </a:r>
+          </a:p>
+        </p:txBody>
+      </p:sp>
+      <p:pic>
+        <p:nvPicPr>
+          <p:cNvPr id="5" name="Picture 4">
+            <a:extLst>
+              <a:ext uri="{FF2B5EF4-FFF2-40B4-BE49-F238E27FC236}">
+                <a16:creationId xmlns:a16="http://schemas.microsoft.com/office/drawing/2014/main" id="{E164D611-34D1-1AD6-E56E-00A8EF336304}"/>
+              </a:ext>
+            </a:extLst>
+          </p:cNvPr>
+          <p:cNvPicPr>
+            <a:picLocks noChangeAspect="1"/>
+          </p:cNvPicPr>
+          <p:nvPr/>
+        </p:nvPicPr>
+        <p:blipFill>
+          <a:blip r:embed="rId2"/>
+          <a:stretch>
+            <a:fillRect/>
+          </a:stretch>
+        </p:blipFill>
+        <p:spPr>
+          <a:xfrm>
+            <a:off x="506114" y="1995946"/>
+            <a:ext cx="2217421" cy="3092887"/>
+          </a:xfrm>
+          <a:prstGeom prst="rect">
+            <a:avLst/>
+          </a:prstGeom>
+        </p:spPr>
+      </p:pic>
+      <p:sp>
+        <p:nvSpPr>
+          <p:cNvPr id="7" name="TextBox 6">
+            <a:extLst>
+              <a:ext uri="{FF2B5EF4-FFF2-40B4-BE49-F238E27FC236}">
+                <a16:creationId xmlns:a16="http://schemas.microsoft.com/office/drawing/2014/main" id="{C9AA51F4-CE01-4B37-EBDD-7D511D50D5A0}"/>
+              </a:ext>
+            </a:extLst>
+          </p:cNvPr>
+          <p:cNvSpPr txBox="1"/>
+          <p:nvPr/>
+        </p:nvSpPr>
+        <p:spPr>
+          <a:xfrm>
+            <a:off x="1148204" y="1316977"/>
+            <a:ext cx="6866742" cy="738664"/>
+          </a:xfrm>
+          <a:prstGeom prst="rect">
+            <a:avLst/>
+          </a:prstGeom>
+          <a:noFill/>
+        </p:spPr>
+        <p:txBody>
+          <a:bodyPr wrap="square" rtlCol="0">
+            <a:spAutoFit/>
+          </a:bodyPr>
+          <a:lstStyle/>
+          <a:p>
+            <a:r>
+              <a:rPr lang="en-US" dirty="0">
+                <a:solidFill>
+                  <a:schemeClr val="bg1"/>
+                </a:solidFill>
+              </a:rPr>
+              <a:t>many to many relationship (with manual junction table – when inserting records you must create junction table record manually to link records; use when you have fields on the junction table itself outside of the IDs):</a:t>
+            </a:r>
+          </a:p>
+        </p:txBody>
+      </p:sp>
+      <p:pic>
+        <p:nvPicPr>
+          <p:cNvPr id="6" name="Picture 5">
+            <a:extLst>
+              <a:ext uri="{FF2B5EF4-FFF2-40B4-BE49-F238E27FC236}">
+                <a16:creationId xmlns:a16="http://schemas.microsoft.com/office/drawing/2014/main" id="{55E13BB0-2517-1559-A42D-FF3B67993181}"/>
+              </a:ext>
+            </a:extLst>
+          </p:cNvPr>
+          <p:cNvPicPr>
+            <a:picLocks noChangeAspect="1"/>
+          </p:cNvPicPr>
+          <p:nvPr/>
+        </p:nvPicPr>
+        <p:blipFill>
+          <a:blip r:embed="rId3"/>
+          <a:stretch>
+            <a:fillRect/>
+          </a:stretch>
+        </p:blipFill>
+        <p:spPr>
+          <a:xfrm>
+            <a:off x="2891218" y="2225175"/>
+            <a:ext cx="3047816" cy="2398453"/>
+          </a:xfrm>
+          <a:prstGeom prst="rect">
+            <a:avLst/>
+          </a:prstGeom>
+        </p:spPr>
+      </p:pic>
+      <p:pic>
+        <p:nvPicPr>
+          <p:cNvPr id="9" name="Picture 8">
+            <a:extLst>
+              <a:ext uri="{FF2B5EF4-FFF2-40B4-BE49-F238E27FC236}">
+                <a16:creationId xmlns:a16="http://schemas.microsoft.com/office/drawing/2014/main" id="{D970ACA4-7883-8A62-DFCA-29608FC3CD28}"/>
+              </a:ext>
+            </a:extLst>
+          </p:cNvPr>
+          <p:cNvPicPr>
+            <a:picLocks noChangeAspect="1"/>
+          </p:cNvPicPr>
+          <p:nvPr/>
+        </p:nvPicPr>
+        <p:blipFill>
+          <a:blip r:embed="rId4"/>
+          <a:stretch>
+            <a:fillRect/>
+          </a:stretch>
+        </p:blipFill>
+        <p:spPr>
+          <a:xfrm>
+            <a:off x="6154993" y="2450582"/>
+            <a:ext cx="2889601" cy="1597331"/>
+          </a:xfrm>
+          <a:prstGeom prst="rect">
+            <a:avLst/>
+          </a:prstGeom>
+        </p:spPr>
+      </p:pic>
+    </p:spTree>
+    <p:extLst>
+      <p:ext uri="{BB962C8B-B14F-4D97-AF65-F5344CB8AC3E}">
+        <p14:creationId xmlns:p14="http://schemas.microsoft.com/office/powerpoint/2010/main" val="2203873610"/>
+      </p:ext>
+    </p:extLst>
+  </p:cSld>
+  <p:clrMapOvr>
+    <a:masterClrMapping/>
+  </p:clrMapOvr>
+</p:sld>
+</file>
+
+<file path=ppt/slides/slide19.xml><?xml version="1.0" encoding="utf-8"?>
+<p:sld xmlns:a="http://schemas.openxmlformats.org/drawingml/2006/main" xmlns:r="http://schemas.openxmlformats.org/officeDocument/2006/relationships" xmlns:p="http://schemas.openxmlformats.org/presentationml/2006/main">
+  <p:cSld>
+    <p:spTree>
+      <p:nvGrpSpPr>
+        <p:cNvPr id="1" name="">
+          <a:extLst>
+            <a:ext uri="{FF2B5EF4-FFF2-40B4-BE49-F238E27FC236}">
+              <a16:creationId xmlns:a16="http://schemas.microsoft.com/office/drawing/2014/main" id="{067F4F62-0BA9-F0D4-D3CA-246E597A6B94}"/>
+            </a:ext>
+          </a:extLst>
+        </p:cNvPr>
+        <p:cNvGrpSpPr/>
+        <p:nvPr/>
+      </p:nvGrpSpPr>
+      <p:grpSpPr>
+        <a:xfrm>
+          <a:off x="0" y="0"/>
+          <a:ext cx="0" cy="0"/>
+          <a:chOff x="0" y="0"/>
+          <a:chExt cx="0" cy="0"/>
+        </a:xfrm>
+      </p:grpSpPr>
+      <p:sp>
+        <p:nvSpPr>
+          <p:cNvPr id="3" name="Title 2">
+            <a:extLst>
+              <a:ext uri="{FF2B5EF4-FFF2-40B4-BE49-F238E27FC236}">
+                <a16:creationId xmlns:a16="http://schemas.microsoft.com/office/drawing/2014/main" id="{8C789D0D-C258-140F-C009-B6AC9392F500}"/>
+              </a:ext>
+            </a:extLst>
+          </p:cNvPr>
+          <p:cNvSpPr>
+            <a:spLocks noGrp="1"/>
+          </p:cNvSpPr>
+          <p:nvPr>
+            <p:ph type="title"/>
+          </p:nvPr>
+        </p:nvSpPr>
+        <p:spPr/>
+        <p:txBody>
+          <a:bodyPr/>
+          <a:lstStyle/>
+          <a:p>
+            <a:r>
+              <a:rPr lang="en-US" dirty="0"/>
+              <a:t>Data Annotations – Relationships &amp; Navigation Properties</a:t>
+            </a:r>
+          </a:p>
+        </p:txBody>
+      </p:sp>
+      <p:sp>
+        <p:nvSpPr>
+          <p:cNvPr id="7" name="TextBox 6">
+            <a:extLst>
+              <a:ext uri="{FF2B5EF4-FFF2-40B4-BE49-F238E27FC236}">
+                <a16:creationId xmlns:a16="http://schemas.microsoft.com/office/drawing/2014/main" id="{39051433-93DF-D864-2F05-3EAA68EE61C6}"/>
+              </a:ext>
+            </a:extLst>
+          </p:cNvPr>
+          <p:cNvSpPr txBox="1"/>
+          <p:nvPr/>
+        </p:nvSpPr>
+        <p:spPr>
+          <a:xfrm>
+            <a:off x="2030854" y="1420762"/>
+            <a:ext cx="5082291" cy="523220"/>
+          </a:xfrm>
+          <a:prstGeom prst="rect">
+            <a:avLst/>
+          </a:prstGeom>
+          <a:noFill/>
+        </p:spPr>
+        <p:txBody>
+          <a:bodyPr wrap="square" rtlCol="0">
+            <a:spAutoFit/>
+          </a:bodyPr>
+          <a:lstStyle/>
+          <a:p>
+            <a:r>
+              <a:rPr lang="en-US" dirty="0">
+                <a:solidFill>
+                  <a:schemeClr val="bg1"/>
+                </a:solidFill>
+              </a:rPr>
+              <a:t>many to many relationship (with implicit junction table – no need to manually create junction table records):</a:t>
+            </a:r>
+          </a:p>
+        </p:txBody>
+      </p:sp>
+      <p:pic>
+        <p:nvPicPr>
+          <p:cNvPr id="4" name="Picture 3">
+            <a:extLst>
+              <a:ext uri="{FF2B5EF4-FFF2-40B4-BE49-F238E27FC236}">
+                <a16:creationId xmlns:a16="http://schemas.microsoft.com/office/drawing/2014/main" id="{6D5E5A83-3D2B-F670-4443-0F32B1EC264A}"/>
+              </a:ext>
+            </a:extLst>
+          </p:cNvPr>
+          <p:cNvPicPr>
+            <a:picLocks noChangeAspect="1"/>
+          </p:cNvPicPr>
+          <p:nvPr/>
+        </p:nvPicPr>
+        <p:blipFill>
+          <a:blip r:embed="rId2"/>
+          <a:stretch>
+            <a:fillRect/>
+          </a:stretch>
+        </p:blipFill>
+        <p:spPr>
+          <a:xfrm>
+            <a:off x="644196" y="2254333"/>
+            <a:ext cx="3391947" cy="2485269"/>
+          </a:xfrm>
+          <a:prstGeom prst="rect">
+            <a:avLst/>
+          </a:prstGeom>
+        </p:spPr>
+      </p:pic>
+      <p:pic>
+        <p:nvPicPr>
+          <p:cNvPr id="10" name="Picture 9">
+            <a:extLst>
+              <a:ext uri="{FF2B5EF4-FFF2-40B4-BE49-F238E27FC236}">
+                <a16:creationId xmlns:a16="http://schemas.microsoft.com/office/drawing/2014/main" id="{3A7E6DB9-8F0F-DF31-B8C7-ED6597882FC4}"/>
+              </a:ext>
+            </a:extLst>
+          </p:cNvPr>
+          <p:cNvPicPr>
+            <a:picLocks noChangeAspect="1"/>
+          </p:cNvPicPr>
+          <p:nvPr/>
+        </p:nvPicPr>
+        <p:blipFill>
+          <a:blip r:embed="rId3"/>
+          <a:stretch>
+            <a:fillRect/>
+          </a:stretch>
+        </p:blipFill>
+        <p:spPr>
+          <a:xfrm>
+            <a:off x="4708500" y="2751505"/>
+            <a:ext cx="3296110" cy="1238423"/>
+          </a:xfrm>
+          <a:prstGeom prst="rect">
+            <a:avLst/>
+          </a:prstGeom>
+        </p:spPr>
+      </p:pic>
+    </p:spTree>
+    <p:extLst>
+      <p:ext uri="{BB962C8B-B14F-4D97-AF65-F5344CB8AC3E}">
+        <p14:creationId xmlns:p14="http://schemas.microsoft.com/office/powerpoint/2010/main" val="1980797995"/>
+      </p:ext>
+    </p:extLst>
+  </p:cSld>
+  <p:clrMapOvr>
+    <a:masterClrMapping/>
+  </p:clrMapOvr>
+</p:sld>
+</file>
+
 <file path=ppt/slides/slide2.xml><?xml version="1.0" encoding="utf-8"?>
 <p:sld xmlns:a="http://schemas.openxmlformats.org/drawingml/2006/main" xmlns:r="http://schemas.openxmlformats.org/officeDocument/2006/relationships" xmlns:p="http://schemas.openxmlformats.org/presentationml/2006/main" show="0">
   <p:cSld>
@@ -31826,6 +32638,2245 @@
         </p:txBody>
       </p:sp>
     </p:spTree>
+  </p:cSld>
+  <p:clrMapOvr>
+    <a:masterClrMapping/>
+  </p:clrMapOvr>
+</p:sld>
+</file>
+
+<file path=ppt/slides/slide20.xml><?xml version="1.0" encoding="utf-8"?>
+<p:sld xmlns:a="http://schemas.openxmlformats.org/drawingml/2006/main" xmlns:r="http://schemas.openxmlformats.org/officeDocument/2006/relationships" xmlns:p="http://schemas.openxmlformats.org/presentationml/2006/main">
+  <p:cSld>
+    <p:spTree>
+      <p:nvGrpSpPr>
+        <p:cNvPr id="1" name=""/>
+        <p:cNvGrpSpPr/>
+        <p:nvPr/>
+      </p:nvGrpSpPr>
+      <p:grpSpPr>
+        <a:xfrm>
+          <a:off x="0" y="0"/>
+          <a:ext cx="0" cy="0"/>
+          <a:chOff x="0" y="0"/>
+          <a:chExt cx="0" cy="0"/>
+        </a:xfrm>
+      </p:grpSpPr>
+      <p:sp>
+        <p:nvSpPr>
+          <p:cNvPr id="3" name="Title 2">
+            <a:extLst>
+              <a:ext uri="{FF2B5EF4-FFF2-40B4-BE49-F238E27FC236}">
+                <a16:creationId xmlns:a16="http://schemas.microsoft.com/office/drawing/2014/main" id="{38F91F62-4C7F-FFF7-55FB-9EDCBD590503}"/>
+              </a:ext>
+            </a:extLst>
+          </p:cNvPr>
+          <p:cNvSpPr>
+            <a:spLocks noGrp="1"/>
+          </p:cNvSpPr>
+          <p:nvPr>
+            <p:ph type="title"/>
+          </p:nvPr>
+        </p:nvSpPr>
+        <p:spPr/>
+        <p:txBody>
+          <a:bodyPr/>
+          <a:lstStyle/>
+          <a:p>
+            <a:r>
+              <a:rPr lang="en-US" dirty="0"/>
+              <a:t>Fluent API</a:t>
+            </a:r>
+          </a:p>
+        </p:txBody>
+      </p:sp>
+      <p:pic>
+        <p:nvPicPr>
+          <p:cNvPr id="5" name="Picture 4">
+            <a:extLst>
+              <a:ext uri="{FF2B5EF4-FFF2-40B4-BE49-F238E27FC236}">
+                <a16:creationId xmlns:a16="http://schemas.microsoft.com/office/drawing/2014/main" id="{A85E707E-03A9-240E-816D-1128B4A3729A}"/>
+              </a:ext>
+            </a:extLst>
+          </p:cNvPr>
+          <p:cNvPicPr>
+            <a:picLocks noChangeAspect="1"/>
+          </p:cNvPicPr>
+          <p:nvPr/>
+        </p:nvPicPr>
+        <p:blipFill>
+          <a:blip r:embed="rId2"/>
+          <a:stretch>
+            <a:fillRect/>
+          </a:stretch>
+        </p:blipFill>
+        <p:spPr>
+          <a:xfrm>
+            <a:off x="1597461" y="1037303"/>
+            <a:ext cx="2151894" cy="3899719"/>
+          </a:xfrm>
+          <a:prstGeom prst="rect">
+            <a:avLst/>
+          </a:prstGeom>
+        </p:spPr>
+      </p:pic>
+      <p:sp>
+        <p:nvSpPr>
+          <p:cNvPr id="6" name="TextBox 5">
+            <a:extLst>
+              <a:ext uri="{FF2B5EF4-FFF2-40B4-BE49-F238E27FC236}">
+                <a16:creationId xmlns:a16="http://schemas.microsoft.com/office/drawing/2014/main" id="{5FC06954-B64C-FC39-E0EE-9CECA821BF04}"/>
+              </a:ext>
+            </a:extLst>
+          </p:cNvPr>
+          <p:cNvSpPr txBox="1"/>
+          <p:nvPr/>
+        </p:nvSpPr>
+        <p:spPr>
+          <a:xfrm>
+            <a:off x="4031226" y="2207342"/>
+            <a:ext cx="4267200" cy="1384995"/>
+          </a:xfrm>
+          <a:prstGeom prst="rect">
+            <a:avLst/>
+          </a:prstGeom>
+          <a:noFill/>
+        </p:spPr>
+        <p:txBody>
+          <a:bodyPr wrap="square" rtlCol="0">
+            <a:spAutoFit/>
+          </a:bodyPr>
+          <a:lstStyle/>
+          <a:p>
+            <a:r>
+              <a:rPr lang="en-US" dirty="0">
+                <a:solidFill>
+                  <a:schemeClr val="bg1"/>
+                </a:solidFill>
+              </a:rPr>
+              <a:t>Fluent API is preferred over data annotations for fine-grain control and complex table relationships</a:t>
+            </a:r>
+          </a:p>
+          <a:p>
+            <a:endParaRPr lang="en-US" dirty="0">
+              <a:solidFill>
+                <a:schemeClr val="bg1"/>
+              </a:solidFill>
+            </a:endParaRPr>
+          </a:p>
+          <a:p>
+            <a:r>
+              <a:rPr lang="en-US" dirty="0">
+                <a:solidFill>
+                  <a:schemeClr val="bg1"/>
+                </a:solidFill>
+              </a:rPr>
+              <a:t>This also keeps our Domain models ‘pure’ and thus creates a clean separation of concerns from domain between</a:t>
+            </a:r>
+            <a:r>
+              <a:rPr lang="en-US" dirty="0">
+                <a:solidFill>
+                  <a:schemeClr val="bg1"/>
+                </a:solidFill>
+                <a:sym typeface="Wingdings" panose="05000000000000000000" pitchFamily="2" charset="2"/>
+              </a:rPr>
+              <a:t> persistence </a:t>
+            </a:r>
+            <a:endParaRPr lang="en-US" dirty="0">
+              <a:solidFill>
+                <a:schemeClr val="bg1"/>
+              </a:solidFill>
+            </a:endParaRPr>
+          </a:p>
+        </p:txBody>
+      </p:sp>
+    </p:spTree>
+    <p:extLst>
+      <p:ext uri="{BB962C8B-B14F-4D97-AF65-F5344CB8AC3E}">
+        <p14:creationId xmlns:p14="http://schemas.microsoft.com/office/powerpoint/2010/main" val="3722538948"/>
+      </p:ext>
+    </p:extLst>
+  </p:cSld>
+  <p:clrMapOvr>
+    <a:masterClrMapping/>
+  </p:clrMapOvr>
+</p:sld>
+</file>
+
+<file path=ppt/slides/slide21.xml><?xml version="1.0" encoding="utf-8"?>
+<p:sld xmlns:a="http://schemas.openxmlformats.org/drawingml/2006/main" xmlns:r="http://schemas.openxmlformats.org/officeDocument/2006/relationships" xmlns:p="http://schemas.openxmlformats.org/presentationml/2006/main">
+  <p:cSld>
+    <p:spTree>
+      <p:nvGrpSpPr>
+        <p:cNvPr id="1" name="">
+          <a:extLst>
+            <a:ext uri="{FF2B5EF4-FFF2-40B4-BE49-F238E27FC236}">
+              <a16:creationId xmlns:a16="http://schemas.microsoft.com/office/drawing/2014/main" id="{FF1B59F9-1799-6597-8BBD-E55D07F76507}"/>
+            </a:ext>
+          </a:extLst>
+        </p:cNvPr>
+        <p:cNvGrpSpPr/>
+        <p:nvPr/>
+      </p:nvGrpSpPr>
+      <p:grpSpPr>
+        <a:xfrm>
+          <a:off x="0" y="0"/>
+          <a:ext cx="0" cy="0"/>
+          <a:chOff x="0" y="0"/>
+          <a:chExt cx="0" cy="0"/>
+        </a:xfrm>
+      </p:grpSpPr>
+      <p:sp>
+        <p:nvSpPr>
+          <p:cNvPr id="3" name="Title 2">
+            <a:extLst>
+              <a:ext uri="{FF2B5EF4-FFF2-40B4-BE49-F238E27FC236}">
+                <a16:creationId xmlns:a16="http://schemas.microsoft.com/office/drawing/2014/main" id="{56C1123D-410F-A7D0-C3EB-B261040A5D39}"/>
+              </a:ext>
+            </a:extLst>
+          </p:cNvPr>
+          <p:cNvSpPr>
+            <a:spLocks noGrp="1"/>
+          </p:cNvSpPr>
+          <p:nvPr>
+            <p:ph type="title"/>
+          </p:nvPr>
+        </p:nvSpPr>
+        <p:spPr/>
+        <p:txBody>
+          <a:bodyPr/>
+          <a:lstStyle/>
+          <a:p>
+            <a:r>
+              <a:rPr lang="en-US" dirty="0"/>
+              <a:t>Fluent API – Other Common Methods</a:t>
+            </a:r>
+          </a:p>
+        </p:txBody>
+      </p:sp>
+      <p:pic>
+        <p:nvPicPr>
+          <p:cNvPr id="4" name="Picture 3">
+            <a:extLst>
+              <a:ext uri="{FF2B5EF4-FFF2-40B4-BE49-F238E27FC236}">
+                <a16:creationId xmlns:a16="http://schemas.microsoft.com/office/drawing/2014/main" id="{BC231B80-0781-C8BD-80BB-6CC0B04C974B}"/>
+              </a:ext>
+            </a:extLst>
+          </p:cNvPr>
+          <p:cNvPicPr>
+            <a:picLocks noChangeAspect="1"/>
+          </p:cNvPicPr>
+          <p:nvPr/>
+        </p:nvPicPr>
+        <p:blipFill>
+          <a:blip r:embed="rId2"/>
+          <a:stretch>
+            <a:fillRect/>
+          </a:stretch>
+        </p:blipFill>
+        <p:spPr>
+          <a:xfrm>
+            <a:off x="1103923" y="1376729"/>
+            <a:ext cx="2645308" cy="662920"/>
+          </a:xfrm>
+          <a:prstGeom prst="rect">
+            <a:avLst/>
+          </a:prstGeom>
+        </p:spPr>
+      </p:pic>
+      <p:pic>
+        <p:nvPicPr>
+          <p:cNvPr id="8" name="Picture 7">
+            <a:extLst>
+              <a:ext uri="{FF2B5EF4-FFF2-40B4-BE49-F238E27FC236}">
+                <a16:creationId xmlns:a16="http://schemas.microsoft.com/office/drawing/2014/main" id="{06C3EF01-4B87-B284-2E2B-04F8210056B9}"/>
+              </a:ext>
+            </a:extLst>
+          </p:cNvPr>
+          <p:cNvPicPr>
+            <a:picLocks noChangeAspect="1"/>
+          </p:cNvPicPr>
+          <p:nvPr/>
+        </p:nvPicPr>
+        <p:blipFill>
+          <a:blip r:embed="rId3"/>
+          <a:stretch>
+            <a:fillRect/>
+          </a:stretch>
+        </p:blipFill>
+        <p:spPr>
+          <a:xfrm>
+            <a:off x="763776" y="2239118"/>
+            <a:ext cx="3172268" cy="952633"/>
+          </a:xfrm>
+          <a:prstGeom prst="rect">
+            <a:avLst/>
+          </a:prstGeom>
+        </p:spPr>
+      </p:pic>
+      <p:pic>
+        <p:nvPicPr>
+          <p:cNvPr id="10" name="Picture 9">
+            <a:extLst>
+              <a:ext uri="{FF2B5EF4-FFF2-40B4-BE49-F238E27FC236}">
+                <a16:creationId xmlns:a16="http://schemas.microsoft.com/office/drawing/2014/main" id="{772D8AAA-C837-E99B-B462-03232272B4CD}"/>
+              </a:ext>
+            </a:extLst>
+          </p:cNvPr>
+          <p:cNvPicPr>
+            <a:picLocks noChangeAspect="1"/>
+          </p:cNvPicPr>
+          <p:nvPr/>
+        </p:nvPicPr>
+        <p:blipFill>
+          <a:blip r:embed="rId4"/>
+          <a:stretch>
+            <a:fillRect/>
+          </a:stretch>
+        </p:blipFill>
+        <p:spPr>
+          <a:xfrm>
+            <a:off x="1103923" y="3346767"/>
+            <a:ext cx="2421322" cy="1670034"/>
+          </a:xfrm>
+          <a:prstGeom prst="rect">
+            <a:avLst/>
+          </a:prstGeom>
+        </p:spPr>
+      </p:pic>
+      <p:pic>
+        <p:nvPicPr>
+          <p:cNvPr id="12" name="Picture 11">
+            <a:extLst>
+              <a:ext uri="{FF2B5EF4-FFF2-40B4-BE49-F238E27FC236}">
+                <a16:creationId xmlns:a16="http://schemas.microsoft.com/office/drawing/2014/main" id="{E5400599-A575-13F2-733E-DFBEA78E56F1}"/>
+              </a:ext>
+            </a:extLst>
+          </p:cNvPr>
+          <p:cNvPicPr>
+            <a:picLocks noChangeAspect="1"/>
+          </p:cNvPicPr>
+          <p:nvPr/>
+        </p:nvPicPr>
+        <p:blipFill>
+          <a:blip r:embed="rId5"/>
+          <a:stretch>
+            <a:fillRect/>
+          </a:stretch>
+        </p:blipFill>
+        <p:spPr>
+          <a:xfrm>
+            <a:off x="4797079" y="1407328"/>
+            <a:ext cx="3172268" cy="889673"/>
+          </a:xfrm>
+          <a:prstGeom prst="rect">
+            <a:avLst/>
+          </a:prstGeom>
+        </p:spPr>
+      </p:pic>
+      <p:pic>
+        <p:nvPicPr>
+          <p:cNvPr id="14" name="Picture 13">
+            <a:extLst>
+              <a:ext uri="{FF2B5EF4-FFF2-40B4-BE49-F238E27FC236}">
+                <a16:creationId xmlns:a16="http://schemas.microsoft.com/office/drawing/2014/main" id="{2AF5F033-634C-0500-93CA-868B2ED4DC78}"/>
+              </a:ext>
+            </a:extLst>
+          </p:cNvPr>
+          <p:cNvPicPr>
+            <a:picLocks noChangeAspect="1"/>
+          </p:cNvPicPr>
+          <p:nvPr/>
+        </p:nvPicPr>
+        <p:blipFill>
+          <a:blip r:embed="rId6"/>
+          <a:stretch>
+            <a:fillRect/>
+          </a:stretch>
+        </p:blipFill>
+        <p:spPr>
+          <a:xfrm>
+            <a:off x="5009535" y="2571750"/>
+            <a:ext cx="2537415" cy="676160"/>
+          </a:xfrm>
+          <a:prstGeom prst="rect">
+            <a:avLst/>
+          </a:prstGeom>
+        </p:spPr>
+      </p:pic>
+      <p:pic>
+        <p:nvPicPr>
+          <p:cNvPr id="16" name="Picture 15">
+            <a:extLst>
+              <a:ext uri="{FF2B5EF4-FFF2-40B4-BE49-F238E27FC236}">
+                <a16:creationId xmlns:a16="http://schemas.microsoft.com/office/drawing/2014/main" id="{67141DD3-00EB-3F7E-5313-16EBB97FA1F5}"/>
+              </a:ext>
+            </a:extLst>
+          </p:cNvPr>
+          <p:cNvPicPr>
+            <a:picLocks noChangeAspect="1"/>
+          </p:cNvPicPr>
+          <p:nvPr/>
+        </p:nvPicPr>
+        <p:blipFill>
+          <a:blip r:embed="rId7"/>
+          <a:stretch>
+            <a:fillRect/>
+          </a:stretch>
+        </p:blipFill>
+        <p:spPr>
+          <a:xfrm>
+            <a:off x="4341478" y="3522659"/>
+            <a:ext cx="3698599" cy="1208729"/>
+          </a:xfrm>
+          <a:prstGeom prst="rect">
+            <a:avLst/>
+          </a:prstGeom>
+        </p:spPr>
+      </p:pic>
+    </p:spTree>
+    <p:extLst>
+      <p:ext uri="{BB962C8B-B14F-4D97-AF65-F5344CB8AC3E}">
+        <p14:creationId xmlns:p14="http://schemas.microsoft.com/office/powerpoint/2010/main" val="114595118"/>
+      </p:ext>
+    </p:extLst>
+  </p:cSld>
+  <p:clrMapOvr>
+    <a:masterClrMapping/>
+  </p:clrMapOvr>
+</p:sld>
+</file>
+
+<file path=ppt/slides/slide22.xml><?xml version="1.0" encoding="utf-8"?>
+<p:sld xmlns:a="http://schemas.openxmlformats.org/drawingml/2006/main" xmlns:r="http://schemas.openxmlformats.org/officeDocument/2006/relationships" xmlns:p="http://schemas.openxmlformats.org/presentationml/2006/main">
+  <p:cSld>
+    <p:spTree>
+      <p:nvGrpSpPr>
+        <p:cNvPr id="1" name="">
+          <a:extLst>
+            <a:ext uri="{FF2B5EF4-FFF2-40B4-BE49-F238E27FC236}">
+              <a16:creationId xmlns:a16="http://schemas.microsoft.com/office/drawing/2014/main" id="{AFC5956F-D8C1-79AD-7C7C-A57B363F4E6E}"/>
+            </a:ext>
+          </a:extLst>
+        </p:cNvPr>
+        <p:cNvGrpSpPr/>
+        <p:nvPr/>
+      </p:nvGrpSpPr>
+      <p:grpSpPr>
+        <a:xfrm>
+          <a:off x="0" y="0"/>
+          <a:ext cx="0" cy="0"/>
+          <a:chOff x="0" y="0"/>
+          <a:chExt cx="0" cy="0"/>
+        </a:xfrm>
+      </p:grpSpPr>
+      <p:sp>
+        <p:nvSpPr>
+          <p:cNvPr id="3" name="Title 2">
+            <a:extLst>
+              <a:ext uri="{FF2B5EF4-FFF2-40B4-BE49-F238E27FC236}">
+                <a16:creationId xmlns:a16="http://schemas.microsoft.com/office/drawing/2014/main" id="{A65D7488-7C21-C660-CD40-A6844D2EAA96}"/>
+              </a:ext>
+            </a:extLst>
+          </p:cNvPr>
+          <p:cNvSpPr>
+            <a:spLocks noGrp="1"/>
+          </p:cNvSpPr>
+          <p:nvPr>
+            <p:ph type="title"/>
+          </p:nvPr>
+        </p:nvSpPr>
+        <p:spPr/>
+        <p:txBody>
+          <a:bodyPr/>
+          <a:lstStyle/>
+          <a:p>
+            <a:r>
+              <a:rPr lang="en-US" dirty="0"/>
+              <a:t>Fluent API – Best Practice</a:t>
+            </a:r>
+          </a:p>
+        </p:txBody>
+      </p:sp>
+      <p:pic>
+        <p:nvPicPr>
+          <p:cNvPr id="5" name="Picture 4">
+            <a:extLst>
+              <a:ext uri="{FF2B5EF4-FFF2-40B4-BE49-F238E27FC236}">
+                <a16:creationId xmlns:a16="http://schemas.microsoft.com/office/drawing/2014/main" id="{FD4248B4-CDFF-3F47-0685-3F83F6D91A16}"/>
+              </a:ext>
+            </a:extLst>
+          </p:cNvPr>
+          <p:cNvPicPr>
+            <a:picLocks noChangeAspect="1"/>
+          </p:cNvPicPr>
+          <p:nvPr/>
+        </p:nvPicPr>
+        <p:blipFill>
+          <a:blip r:embed="rId2"/>
+          <a:stretch>
+            <a:fillRect/>
+          </a:stretch>
+        </p:blipFill>
+        <p:spPr>
+          <a:xfrm>
+            <a:off x="585406" y="1715728"/>
+            <a:ext cx="3538456" cy="3216377"/>
+          </a:xfrm>
+          <a:prstGeom prst="rect">
+            <a:avLst/>
+          </a:prstGeom>
+        </p:spPr>
+      </p:pic>
+      <p:pic>
+        <p:nvPicPr>
+          <p:cNvPr id="7" name="Picture 6">
+            <a:extLst>
+              <a:ext uri="{FF2B5EF4-FFF2-40B4-BE49-F238E27FC236}">
+                <a16:creationId xmlns:a16="http://schemas.microsoft.com/office/drawing/2014/main" id="{56CD031F-6EF1-FED8-F685-B863156BF31F}"/>
+              </a:ext>
+            </a:extLst>
+          </p:cNvPr>
+          <p:cNvPicPr>
+            <a:picLocks noChangeAspect="1"/>
+          </p:cNvPicPr>
+          <p:nvPr/>
+        </p:nvPicPr>
+        <p:blipFill>
+          <a:blip r:embed="rId3"/>
+          <a:stretch>
+            <a:fillRect/>
+          </a:stretch>
+        </p:blipFill>
+        <p:spPr>
+          <a:xfrm>
+            <a:off x="4572000" y="1981722"/>
+            <a:ext cx="3734648" cy="2229778"/>
+          </a:xfrm>
+          <a:prstGeom prst="rect">
+            <a:avLst/>
+          </a:prstGeom>
+        </p:spPr>
+      </p:pic>
+      <p:sp>
+        <p:nvSpPr>
+          <p:cNvPr id="9" name="TextBox 8">
+            <a:extLst>
+              <a:ext uri="{FF2B5EF4-FFF2-40B4-BE49-F238E27FC236}">
+                <a16:creationId xmlns:a16="http://schemas.microsoft.com/office/drawing/2014/main" id="{920FA7BE-2F31-3307-1F60-E739A56C94ED}"/>
+              </a:ext>
+            </a:extLst>
+          </p:cNvPr>
+          <p:cNvSpPr txBox="1"/>
+          <p:nvPr/>
+        </p:nvSpPr>
+        <p:spPr>
+          <a:xfrm>
+            <a:off x="1774465" y="932000"/>
+            <a:ext cx="5614219" cy="738664"/>
+          </a:xfrm>
+          <a:prstGeom prst="rect">
+            <a:avLst/>
+          </a:prstGeom>
+          <a:noFill/>
+        </p:spPr>
+        <p:txBody>
+          <a:bodyPr wrap="square" rtlCol="0">
+            <a:spAutoFit/>
+          </a:bodyPr>
+          <a:lstStyle/>
+          <a:p>
+            <a:r>
+              <a:rPr lang="en-US" dirty="0">
+                <a:solidFill>
+                  <a:schemeClr val="bg1"/>
+                </a:solidFill>
+              </a:rPr>
+              <a:t>Throwing everything into the </a:t>
+            </a:r>
+            <a:r>
+              <a:rPr lang="en-US" dirty="0" err="1">
+                <a:solidFill>
+                  <a:schemeClr val="bg1"/>
+                </a:solidFill>
+              </a:rPr>
+              <a:t>DbContext</a:t>
+            </a:r>
+            <a:r>
+              <a:rPr lang="en-US" dirty="0">
+                <a:solidFill>
+                  <a:schemeClr val="bg1"/>
+                </a:solidFill>
+              </a:rPr>
+              <a:t> makes for a mess. Instead, we can create separate config classes in the persistence layer and add them to the </a:t>
+            </a:r>
+            <a:r>
+              <a:rPr lang="en-US" dirty="0" err="1">
+                <a:solidFill>
+                  <a:schemeClr val="bg1"/>
+                </a:solidFill>
+              </a:rPr>
+              <a:t>DbContext</a:t>
+            </a:r>
+            <a:r>
+              <a:rPr lang="en-US" dirty="0">
+                <a:solidFill>
+                  <a:schemeClr val="bg1"/>
+                </a:solidFill>
+              </a:rPr>
+              <a:t> with </a:t>
+            </a:r>
+            <a:r>
+              <a:rPr lang="en-US" dirty="0" err="1">
+                <a:solidFill>
+                  <a:schemeClr val="bg1"/>
+                </a:solidFill>
+              </a:rPr>
+              <a:t>ApplyConfigurationsFromAssemly</a:t>
+            </a:r>
+            <a:r>
+              <a:rPr lang="en-US" dirty="0">
+                <a:solidFill>
+                  <a:schemeClr val="bg1"/>
+                </a:solidFill>
+              </a:rPr>
+              <a:t>()</a:t>
+            </a:r>
+          </a:p>
+        </p:txBody>
+      </p:sp>
+    </p:spTree>
+    <p:extLst>
+      <p:ext uri="{BB962C8B-B14F-4D97-AF65-F5344CB8AC3E}">
+        <p14:creationId xmlns:p14="http://schemas.microsoft.com/office/powerpoint/2010/main" val="1382175864"/>
+      </p:ext>
+    </p:extLst>
+  </p:cSld>
+  <p:clrMapOvr>
+    <a:masterClrMapping/>
+  </p:clrMapOvr>
+</p:sld>
+</file>
+
+<file path=ppt/slides/slide23.xml><?xml version="1.0" encoding="utf-8"?>
+<p:sld xmlns:a="http://schemas.openxmlformats.org/drawingml/2006/main" xmlns:r="http://schemas.openxmlformats.org/officeDocument/2006/relationships" xmlns:p="http://schemas.openxmlformats.org/presentationml/2006/main">
+  <p:cSld>
+    <p:spTree>
+      <p:nvGrpSpPr>
+        <p:cNvPr id="1" name=""/>
+        <p:cNvGrpSpPr/>
+        <p:nvPr/>
+      </p:nvGrpSpPr>
+      <p:grpSpPr>
+        <a:xfrm>
+          <a:off x="0" y="0"/>
+          <a:ext cx="0" cy="0"/>
+          <a:chOff x="0" y="0"/>
+          <a:chExt cx="0" cy="0"/>
+        </a:xfrm>
+      </p:grpSpPr>
+      <p:sp>
+        <p:nvSpPr>
+          <p:cNvPr id="2" name="Text Placeholder 1">
+            <a:extLst>
+              <a:ext uri="{FF2B5EF4-FFF2-40B4-BE49-F238E27FC236}">
+                <a16:creationId xmlns:a16="http://schemas.microsoft.com/office/drawing/2014/main" id="{5F390B1C-38E9-2236-811E-5EE312D7319C}"/>
+              </a:ext>
+            </a:extLst>
+          </p:cNvPr>
+          <p:cNvSpPr>
+            <a:spLocks noGrp="1"/>
+          </p:cNvSpPr>
+          <p:nvPr>
+            <p:ph type="body" idx="1"/>
+          </p:nvPr>
+        </p:nvSpPr>
+        <p:spPr/>
+        <p:txBody>
+          <a:bodyPr/>
+          <a:lstStyle/>
+          <a:p>
+            <a:r>
+              <a:rPr lang="en-US" dirty="0"/>
+              <a:t>Caching is the process of storing frequently used data from queries temporarily </a:t>
+            </a:r>
+          </a:p>
+          <a:p>
+            <a:r>
+              <a:rPr lang="en-US" dirty="0"/>
+              <a:t>This allows user queries to get information from the cache instead of hitting the database </a:t>
+            </a:r>
+          </a:p>
+          <a:p>
+            <a:r>
+              <a:rPr lang="en-US" dirty="0"/>
+              <a:t>This improves request response times and efficiency </a:t>
+            </a:r>
+          </a:p>
+          <a:p>
+            <a:r>
+              <a:rPr lang="en-US" dirty="0"/>
+              <a:t>There are 3 main caching types:</a:t>
+            </a:r>
+          </a:p>
+          <a:p>
+            <a:pPr lvl="1"/>
+            <a:r>
+              <a:rPr lang="en-US" dirty="0"/>
+              <a:t>In-Memory cache – stores data in API process memory</a:t>
+            </a:r>
+          </a:p>
+          <a:p>
+            <a:pPr lvl="1"/>
+            <a:r>
+              <a:rPr lang="en-US" dirty="0"/>
+              <a:t>Distributed cache – shared cache across servers (not beginner friendly)</a:t>
+            </a:r>
+          </a:p>
+          <a:p>
+            <a:pPr lvl="1"/>
+            <a:r>
+              <a:rPr lang="en-US" dirty="0"/>
+              <a:t>Response cache – caches the actual HTTP response </a:t>
+            </a:r>
+          </a:p>
+        </p:txBody>
+      </p:sp>
+      <p:sp>
+        <p:nvSpPr>
+          <p:cNvPr id="3" name="Title 2">
+            <a:extLst>
+              <a:ext uri="{FF2B5EF4-FFF2-40B4-BE49-F238E27FC236}">
+                <a16:creationId xmlns:a16="http://schemas.microsoft.com/office/drawing/2014/main" id="{CD9BD135-61F5-79F9-D8C2-3298535C47CB}"/>
+              </a:ext>
+            </a:extLst>
+          </p:cNvPr>
+          <p:cNvSpPr>
+            <a:spLocks noGrp="1"/>
+          </p:cNvSpPr>
+          <p:nvPr>
+            <p:ph type="title"/>
+          </p:nvPr>
+        </p:nvSpPr>
+        <p:spPr/>
+        <p:txBody>
+          <a:bodyPr/>
+          <a:lstStyle/>
+          <a:p>
+            <a:r>
+              <a:rPr lang="en-US" dirty="0"/>
+              <a:t>Caching</a:t>
+            </a:r>
+          </a:p>
+        </p:txBody>
+      </p:sp>
+    </p:spTree>
+    <p:extLst>
+      <p:ext uri="{BB962C8B-B14F-4D97-AF65-F5344CB8AC3E}">
+        <p14:creationId xmlns:p14="http://schemas.microsoft.com/office/powerpoint/2010/main" val="2742588426"/>
+      </p:ext>
+    </p:extLst>
+  </p:cSld>
+  <p:clrMapOvr>
+    <a:masterClrMapping/>
+  </p:clrMapOvr>
+</p:sld>
+</file>
+
+<file path=ppt/slides/slide24.xml><?xml version="1.0" encoding="utf-8"?>
+<p:sld xmlns:a="http://schemas.openxmlformats.org/drawingml/2006/main" xmlns:r="http://schemas.openxmlformats.org/officeDocument/2006/relationships" xmlns:p="http://schemas.openxmlformats.org/presentationml/2006/main">
+  <p:cSld>
+    <p:spTree>
+      <p:nvGrpSpPr>
+        <p:cNvPr id="1" name="">
+          <a:extLst>
+            <a:ext uri="{FF2B5EF4-FFF2-40B4-BE49-F238E27FC236}">
+              <a16:creationId xmlns:a16="http://schemas.microsoft.com/office/drawing/2014/main" id="{0B12648D-0EB4-1AAC-2CEC-AF54D55BAD13}"/>
+            </a:ext>
+          </a:extLst>
+        </p:cNvPr>
+        <p:cNvGrpSpPr/>
+        <p:nvPr/>
+      </p:nvGrpSpPr>
+      <p:grpSpPr>
+        <a:xfrm>
+          <a:off x="0" y="0"/>
+          <a:ext cx="0" cy="0"/>
+          <a:chOff x="0" y="0"/>
+          <a:chExt cx="0" cy="0"/>
+        </a:xfrm>
+      </p:grpSpPr>
+      <p:sp>
+        <p:nvSpPr>
+          <p:cNvPr id="3" name="Title 2">
+            <a:extLst>
+              <a:ext uri="{FF2B5EF4-FFF2-40B4-BE49-F238E27FC236}">
+                <a16:creationId xmlns:a16="http://schemas.microsoft.com/office/drawing/2014/main" id="{43506812-370F-E4E8-B5B2-3263608B0C42}"/>
+              </a:ext>
+            </a:extLst>
+          </p:cNvPr>
+          <p:cNvSpPr>
+            <a:spLocks noGrp="1"/>
+          </p:cNvSpPr>
+          <p:nvPr>
+            <p:ph type="title"/>
+          </p:nvPr>
+        </p:nvSpPr>
+        <p:spPr/>
+        <p:txBody>
+          <a:bodyPr/>
+          <a:lstStyle/>
+          <a:p>
+            <a:r>
+              <a:rPr lang="en-US" dirty="0"/>
+              <a:t>In-Memory Caching</a:t>
+            </a:r>
+          </a:p>
+        </p:txBody>
+      </p:sp>
+      <p:pic>
+        <p:nvPicPr>
+          <p:cNvPr id="7" name="Picture 6">
+            <a:extLst>
+              <a:ext uri="{FF2B5EF4-FFF2-40B4-BE49-F238E27FC236}">
+                <a16:creationId xmlns:a16="http://schemas.microsoft.com/office/drawing/2014/main" id="{1297E386-8B23-0060-EF0B-10EC87038864}"/>
+              </a:ext>
+            </a:extLst>
+          </p:cNvPr>
+          <p:cNvPicPr>
+            <a:picLocks noChangeAspect="1"/>
+          </p:cNvPicPr>
+          <p:nvPr/>
+        </p:nvPicPr>
+        <p:blipFill>
+          <a:blip r:embed="rId2"/>
+          <a:stretch>
+            <a:fillRect/>
+          </a:stretch>
+        </p:blipFill>
+        <p:spPr>
+          <a:xfrm>
+            <a:off x="422837" y="1720912"/>
+            <a:ext cx="3677163" cy="590632"/>
+          </a:xfrm>
+          <a:prstGeom prst="rect">
+            <a:avLst/>
+          </a:prstGeom>
+        </p:spPr>
+      </p:pic>
+      <p:pic>
+        <p:nvPicPr>
+          <p:cNvPr id="9" name="Picture 8">
+            <a:extLst>
+              <a:ext uri="{FF2B5EF4-FFF2-40B4-BE49-F238E27FC236}">
+                <a16:creationId xmlns:a16="http://schemas.microsoft.com/office/drawing/2014/main" id="{328A8A50-5BAB-1C3F-C59D-1322567D557C}"/>
+              </a:ext>
+            </a:extLst>
+          </p:cNvPr>
+          <p:cNvPicPr>
+            <a:picLocks noChangeAspect="1"/>
+          </p:cNvPicPr>
+          <p:nvPr/>
+        </p:nvPicPr>
+        <p:blipFill>
+          <a:blip r:embed="rId3"/>
+          <a:stretch>
+            <a:fillRect/>
+          </a:stretch>
+        </p:blipFill>
+        <p:spPr>
+          <a:xfrm>
+            <a:off x="396433" y="2820014"/>
+            <a:ext cx="3729970" cy="1391307"/>
+          </a:xfrm>
+          <a:prstGeom prst="rect">
+            <a:avLst/>
+          </a:prstGeom>
+        </p:spPr>
+      </p:pic>
+      <p:pic>
+        <p:nvPicPr>
+          <p:cNvPr id="13" name="Picture 12">
+            <a:extLst>
+              <a:ext uri="{FF2B5EF4-FFF2-40B4-BE49-F238E27FC236}">
+                <a16:creationId xmlns:a16="http://schemas.microsoft.com/office/drawing/2014/main" id="{163923F1-209F-3E92-EC50-EEB6DD566AFD}"/>
+              </a:ext>
+            </a:extLst>
+          </p:cNvPr>
+          <p:cNvPicPr>
+            <a:picLocks noChangeAspect="1"/>
+          </p:cNvPicPr>
+          <p:nvPr/>
+        </p:nvPicPr>
+        <p:blipFill>
+          <a:blip r:embed="rId4"/>
+          <a:stretch>
+            <a:fillRect/>
+          </a:stretch>
+        </p:blipFill>
+        <p:spPr>
+          <a:xfrm>
+            <a:off x="4511809" y="1170038"/>
+            <a:ext cx="3792705" cy="3299952"/>
+          </a:xfrm>
+          <a:prstGeom prst="rect">
+            <a:avLst/>
+          </a:prstGeom>
+        </p:spPr>
+      </p:pic>
+      <p:pic>
+        <p:nvPicPr>
+          <p:cNvPr id="15" name="Picture 14">
+            <a:extLst>
+              <a:ext uri="{FF2B5EF4-FFF2-40B4-BE49-F238E27FC236}">
+                <a16:creationId xmlns:a16="http://schemas.microsoft.com/office/drawing/2014/main" id="{2509CFCD-5F6B-8764-404A-829A93AE4753}"/>
+              </a:ext>
+            </a:extLst>
+          </p:cNvPr>
+          <p:cNvPicPr>
+            <a:picLocks noChangeAspect="1"/>
+          </p:cNvPicPr>
+          <p:nvPr/>
+        </p:nvPicPr>
+        <p:blipFill>
+          <a:blip r:embed="rId5"/>
+          <a:stretch>
+            <a:fillRect/>
+          </a:stretch>
+        </p:blipFill>
+        <p:spPr>
+          <a:xfrm>
+            <a:off x="3434413" y="4839765"/>
+            <a:ext cx="2275174" cy="237240"/>
+          </a:xfrm>
+          <a:prstGeom prst="rect">
+            <a:avLst/>
+          </a:prstGeom>
+        </p:spPr>
+      </p:pic>
+      <p:sp>
+        <p:nvSpPr>
+          <p:cNvPr id="16" name="TextBox 15">
+            <a:extLst>
+              <a:ext uri="{FF2B5EF4-FFF2-40B4-BE49-F238E27FC236}">
+                <a16:creationId xmlns:a16="http://schemas.microsoft.com/office/drawing/2014/main" id="{839A74EB-741E-29FB-6D85-7E06AFA5DBB7}"/>
+              </a:ext>
+            </a:extLst>
+          </p:cNvPr>
+          <p:cNvSpPr txBox="1"/>
+          <p:nvPr/>
+        </p:nvSpPr>
+        <p:spPr>
+          <a:xfrm>
+            <a:off x="2511179" y="4554139"/>
+            <a:ext cx="4121641" cy="307777"/>
+          </a:xfrm>
+          <a:prstGeom prst="rect">
+            <a:avLst/>
+          </a:prstGeom>
+          <a:noFill/>
+        </p:spPr>
+        <p:txBody>
+          <a:bodyPr wrap="none" rtlCol="0">
+            <a:spAutoFit/>
+          </a:bodyPr>
+          <a:lstStyle/>
+          <a:p>
+            <a:r>
+              <a:rPr lang="en-US" dirty="0">
+                <a:solidFill>
+                  <a:schemeClr val="bg1"/>
+                </a:solidFill>
+              </a:rPr>
+              <a:t>You can also restart the timer for repeat requests:</a:t>
+            </a:r>
+          </a:p>
+        </p:txBody>
+      </p:sp>
+      <p:sp>
+        <p:nvSpPr>
+          <p:cNvPr id="17" name="TextBox 16">
+            <a:extLst>
+              <a:ext uri="{FF2B5EF4-FFF2-40B4-BE49-F238E27FC236}">
+                <a16:creationId xmlns:a16="http://schemas.microsoft.com/office/drawing/2014/main" id="{1555FFD9-CCF0-3335-507A-6FF1FFFDD379}"/>
+              </a:ext>
+            </a:extLst>
+          </p:cNvPr>
+          <p:cNvSpPr txBox="1"/>
+          <p:nvPr/>
+        </p:nvSpPr>
+        <p:spPr>
+          <a:xfrm>
+            <a:off x="4511809" y="897131"/>
+            <a:ext cx="1269899" cy="307777"/>
+          </a:xfrm>
+          <a:prstGeom prst="rect">
+            <a:avLst/>
+          </a:prstGeom>
+          <a:noFill/>
+        </p:spPr>
+        <p:txBody>
+          <a:bodyPr wrap="none" rtlCol="0">
+            <a:spAutoFit/>
+          </a:bodyPr>
+          <a:lstStyle/>
+          <a:p>
+            <a:r>
+              <a:rPr lang="en-US" dirty="0">
+                <a:solidFill>
+                  <a:schemeClr val="bg1"/>
+                </a:solidFill>
+              </a:rPr>
+              <a:t>Service layer:</a:t>
+            </a:r>
+          </a:p>
+        </p:txBody>
+      </p:sp>
+      <p:sp>
+        <p:nvSpPr>
+          <p:cNvPr id="18" name="TextBox 17">
+            <a:extLst>
+              <a:ext uri="{FF2B5EF4-FFF2-40B4-BE49-F238E27FC236}">
+                <a16:creationId xmlns:a16="http://schemas.microsoft.com/office/drawing/2014/main" id="{D1BD79C5-61F1-8CC9-CE1C-419382E0C944}"/>
+              </a:ext>
+            </a:extLst>
+          </p:cNvPr>
+          <p:cNvSpPr txBox="1"/>
+          <p:nvPr/>
+        </p:nvSpPr>
+        <p:spPr>
+          <a:xfrm>
+            <a:off x="475667" y="1359247"/>
+            <a:ext cx="1149674" cy="307777"/>
+          </a:xfrm>
+          <a:prstGeom prst="rect">
+            <a:avLst/>
+          </a:prstGeom>
+          <a:noFill/>
+        </p:spPr>
+        <p:txBody>
+          <a:bodyPr wrap="none" rtlCol="0">
+            <a:spAutoFit/>
+          </a:bodyPr>
+          <a:lstStyle/>
+          <a:p>
+            <a:r>
+              <a:rPr lang="en-US" dirty="0" err="1">
+                <a:solidFill>
+                  <a:schemeClr val="bg1"/>
+                </a:solidFill>
+              </a:rPr>
+              <a:t>Program.cs</a:t>
+            </a:r>
+            <a:r>
+              <a:rPr lang="en-US" dirty="0">
+                <a:solidFill>
+                  <a:schemeClr val="bg1"/>
+                </a:solidFill>
+              </a:rPr>
+              <a:t>:</a:t>
+            </a:r>
+          </a:p>
+        </p:txBody>
+      </p:sp>
+      <p:sp>
+        <p:nvSpPr>
+          <p:cNvPr id="19" name="TextBox 18">
+            <a:extLst>
+              <a:ext uri="{FF2B5EF4-FFF2-40B4-BE49-F238E27FC236}">
+                <a16:creationId xmlns:a16="http://schemas.microsoft.com/office/drawing/2014/main" id="{F562BC3E-4297-1EE0-31CC-62957DD461D4}"/>
+              </a:ext>
+            </a:extLst>
+          </p:cNvPr>
+          <p:cNvSpPr txBox="1"/>
+          <p:nvPr/>
+        </p:nvSpPr>
+        <p:spPr>
+          <a:xfrm>
+            <a:off x="313435" y="2477196"/>
+            <a:ext cx="1269899" cy="307777"/>
+          </a:xfrm>
+          <a:prstGeom prst="rect">
+            <a:avLst/>
+          </a:prstGeom>
+          <a:noFill/>
+        </p:spPr>
+        <p:txBody>
+          <a:bodyPr wrap="none" rtlCol="0">
+            <a:spAutoFit/>
+          </a:bodyPr>
+          <a:lstStyle/>
+          <a:p>
+            <a:r>
+              <a:rPr lang="en-US" dirty="0">
+                <a:solidFill>
+                  <a:schemeClr val="bg1"/>
+                </a:solidFill>
+              </a:rPr>
+              <a:t>Service layer:</a:t>
+            </a:r>
+          </a:p>
+        </p:txBody>
+      </p:sp>
+    </p:spTree>
+    <p:extLst>
+      <p:ext uri="{BB962C8B-B14F-4D97-AF65-F5344CB8AC3E}">
+        <p14:creationId xmlns:p14="http://schemas.microsoft.com/office/powerpoint/2010/main" val="3830939026"/>
+      </p:ext>
+    </p:extLst>
+  </p:cSld>
+  <p:clrMapOvr>
+    <a:masterClrMapping/>
+  </p:clrMapOvr>
+</p:sld>
+</file>
+
+<file path=ppt/slides/slide25.xml><?xml version="1.0" encoding="utf-8"?>
+<p:sld xmlns:a="http://schemas.openxmlformats.org/drawingml/2006/main" xmlns:r="http://schemas.openxmlformats.org/officeDocument/2006/relationships" xmlns:p="http://schemas.openxmlformats.org/presentationml/2006/main">
+  <p:cSld>
+    <p:spTree>
+      <p:nvGrpSpPr>
+        <p:cNvPr id="1" name=""/>
+        <p:cNvGrpSpPr/>
+        <p:nvPr/>
+      </p:nvGrpSpPr>
+      <p:grpSpPr>
+        <a:xfrm>
+          <a:off x="0" y="0"/>
+          <a:ext cx="0" cy="0"/>
+          <a:chOff x="0" y="0"/>
+          <a:chExt cx="0" cy="0"/>
+        </a:xfrm>
+      </p:grpSpPr>
+      <p:sp>
+        <p:nvSpPr>
+          <p:cNvPr id="3" name="Title 2">
+            <a:extLst>
+              <a:ext uri="{FF2B5EF4-FFF2-40B4-BE49-F238E27FC236}">
+                <a16:creationId xmlns:a16="http://schemas.microsoft.com/office/drawing/2014/main" id="{0A39E8DF-95FF-C605-F7F8-CE72BE7FC85A}"/>
+              </a:ext>
+            </a:extLst>
+          </p:cNvPr>
+          <p:cNvSpPr>
+            <a:spLocks noGrp="1"/>
+          </p:cNvSpPr>
+          <p:nvPr>
+            <p:ph type="title"/>
+          </p:nvPr>
+        </p:nvSpPr>
+        <p:spPr/>
+        <p:txBody>
+          <a:bodyPr/>
+          <a:lstStyle/>
+          <a:p>
+            <a:r>
+              <a:rPr lang="en-US" dirty="0"/>
+              <a:t>Cache Invalidation</a:t>
+            </a:r>
+          </a:p>
+        </p:txBody>
+      </p:sp>
+      <p:pic>
+        <p:nvPicPr>
+          <p:cNvPr id="5" name="Picture 4">
+            <a:extLst>
+              <a:ext uri="{FF2B5EF4-FFF2-40B4-BE49-F238E27FC236}">
+                <a16:creationId xmlns:a16="http://schemas.microsoft.com/office/drawing/2014/main" id="{97781062-85E7-E02D-FA47-6C4C4A23EFAA}"/>
+              </a:ext>
+            </a:extLst>
+          </p:cNvPr>
+          <p:cNvPicPr>
+            <a:picLocks noChangeAspect="1"/>
+          </p:cNvPicPr>
+          <p:nvPr/>
+        </p:nvPicPr>
+        <p:blipFill>
+          <a:blip r:embed="rId2"/>
+          <a:stretch>
+            <a:fillRect/>
+          </a:stretch>
+        </p:blipFill>
+        <p:spPr>
+          <a:xfrm>
+            <a:off x="1927315" y="1786559"/>
+            <a:ext cx="5289369" cy="1483123"/>
+          </a:xfrm>
+          <a:prstGeom prst="rect">
+            <a:avLst/>
+          </a:prstGeom>
+        </p:spPr>
+      </p:pic>
+      <p:sp>
+        <p:nvSpPr>
+          <p:cNvPr id="6" name="TextBox 5">
+            <a:extLst>
+              <a:ext uri="{FF2B5EF4-FFF2-40B4-BE49-F238E27FC236}">
+                <a16:creationId xmlns:a16="http://schemas.microsoft.com/office/drawing/2014/main" id="{D3561AEC-DBE2-F95B-9808-DC91FC10B728}"/>
+              </a:ext>
+            </a:extLst>
+          </p:cNvPr>
+          <p:cNvSpPr txBox="1"/>
+          <p:nvPr/>
+        </p:nvSpPr>
+        <p:spPr>
+          <a:xfrm>
+            <a:off x="1953333" y="1128192"/>
+            <a:ext cx="5237331" cy="307777"/>
+          </a:xfrm>
+          <a:prstGeom prst="rect">
+            <a:avLst/>
+          </a:prstGeom>
+          <a:noFill/>
+        </p:spPr>
+        <p:txBody>
+          <a:bodyPr wrap="none" rtlCol="0">
+            <a:spAutoFit/>
+          </a:bodyPr>
+          <a:lstStyle/>
+          <a:p>
+            <a:r>
+              <a:rPr lang="en-US" dirty="0">
+                <a:solidFill>
+                  <a:schemeClr val="bg1"/>
+                </a:solidFill>
+              </a:rPr>
+              <a:t>Guard against stale cache data when updating/creating/deleting:</a:t>
+            </a:r>
+          </a:p>
+        </p:txBody>
+      </p:sp>
+      <p:pic>
+        <p:nvPicPr>
+          <p:cNvPr id="8" name="Picture 7">
+            <a:extLst>
+              <a:ext uri="{FF2B5EF4-FFF2-40B4-BE49-F238E27FC236}">
+                <a16:creationId xmlns:a16="http://schemas.microsoft.com/office/drawing/2014/main" id="{D87EFC0E-7811-EB35-1B1A-B6071DBC3F88}"/>
+              </a:ext>
+            </a:extLst>
+          </p:cNvPr>
+          <p:cNvPicPr>
+            <a:picLocks noChangeAspect="1"/>
+          </p:cNvPicPr>
+          <p:nvPr/>
+        </p:nvPicPr>
+        <p:blipFill>
+          <a:blip r:embed="rId3"/>
+          <a:stretch>
+            <a:fillRect/>
+          </a:stretch>
+        </p:blipFill>
+        <p:spPr>
+          <a:xfrm>
+            <a:off x="2756335" y="4015308"/>
+            <a:ext cx="3631325" cy="1042815"/>
+          </a:xfrm>
+          <a:prstGeom prst="rect">
+            <a:avLst/>
+          </a:prstGeom>
+        </p:spPr>
+      </p:pic>
+      <p:sp>
+        <p:nvSpPr>
+          <p:cNvPr id="9" name="TextBox 8">
+            <a:extLst>
+              <a:ext uri="{FF2B5EF4-FFF2-40B4-BE49-F238E27FC236}">
+                <a16:creationId xmlns:a16="http://schemas.microsoft.com/office/drawing/2014/main" id="{591EB862-2A8C-B908-ACD6-B58BBD146C10}"/>
+              </a:ext>
+            </a:extLst>
+          </p:cNvPr>
+          <p:cNvSpPr txBox="1"/>
+          <p:nvPr/>
+        </p:nvSpPr>
+        <p:spPr>
+          <a:xfrm>
+            <a:off x="3201229" y="3367548"/>
+            <a:ext cx="2760692" cy="307777"/>
+          </a:xfrm>
+          <a:prstGeom prst="rect">
+            <a:avLst/>
+          </a:prstGeom>
+          <a:noFill/>
+        </p:spPr>
+        <p:txBody>
+          <a:bodyPr wrap="none" rtlCol="0">
+            <a:spAutoFit/>
+          </a:bodyPr>
+          <a:lstStyle/>
+          <a:p>
+            <a:r>
+              <a:rPr lang="en-US" dirty="0">
+                <a:solidFill>
+                  <a:schemeClr val="bg1"/>
+                </a:solidFill>
+              </a:rPr>
+              <a:t>Stop change tracking altogether:</a:t>
+            </a:r>
+          </a:p>
+        </p:txBody>
+      </p:sp>
+      <p:sp>
+        <p:nvSpPr>
+          <p:cNvPr id="10" name="TextBox 9">
+            <a:extLst>
+              <a:ext uri="{FF2B5EF4-FFF2-40B4-BE49-F238E27FC236}">
+                <a16:creationId xmlns:a16="http://schemas.microsoft.com/office/drawing/2014/main" id="{7A72D919-7319-8C49-ABA3-AC66E60356F3}"/>
+              </a:ext>
+            </a:extLst>
+          </p:cNvPr>
+          <p:cNvSpPr txBox="1"/>
+          <p:nvPr/>
+        </p:nvSpPr>
+        <p:spPr>
+          <a:xfrm>
+            <a:off x="1842351" y="1494514"/>
+            <a:ext cx="1269899" cy="307777"/>
+          </a:xfrm>
+          <a:prstGeom prst="rect">
+            <a:avLst/>
+          </a:prstGeom>
+          <a:noFill/>
+        </p:spPr>
+        <p:txBody>
+          <a:bodyPr wrap="none" rtlCol="0">
+            <a:spAutoFit/>
+          </a:bodyPr>
+          <a:lstStyle/>
+          <a:p>
+            <a:r>
+              <a:rPr lang="en-US" dirty="0">
+                <a:solidFill>
+                  <a:schemeClr val="bg1"/>
+                </a:solidFill>
+              </a:rPr>
+              <a:t>Service layer:</a:t>
+            </a:r>
+          </a:p>
+        </p:txBody>
+      </p:sp>
+      <p:sp>
+        <p:nvSpPr>
+          <p:cNvPr id="11" name="TextBox 10">
+            <a:extLst>
+              <a:ext uri="{FF2B5EF4-FFF2-40B4-BE49-F238E27FC236}">
+                <a16:creationId xmlns:a16="http://schemas.microsoft.com/office/drawing/2014/main" id="{FE007A23-3CB9-41D0-21F9-BCCCFE76E8F0}"/>
+              </a:ext>
+            </a:extLst>
+          </p:cNvPr>
+          <p:cNvSpPr txBox="1"/>
+          <p:nvPr/>
+        </p:nvSpPr>
+        <p:spPr>
+          <a:xfrm>
+            <a:off x="2702673" y="3707531"/>
+            <a:ext cx="1099981" cy="307777"/>
+          </a:xfrm>
+          <a:prstGeom prst="rect">
+            <a:avLst/>
+          </a:prstGeom>
+          <a:noFill/>
+        </p:spPr>
+        <p:txBody>
+          <a:bodyPr wrap="none" rtlCol="0">
+            <a:spAutoFit/>
+          </a:bodyPr>
+          <a:lstStyle/>
+          <a:p>
+            <a:r>
+              <a:rPr lang="en-US" dirty="0">
+                <a:solidFill>
+                  <a:schemeClr val="bg1"/>
+                </a:solidFill>
+              </a:rPr>
+              <a:t>Repo layer:</a:t>
+            </a:r>
+          </a:p>
+        </p:txBody>
+      </p:sp>
+    </p:spTree>
+    <p:extLst>
+      <p:ext uri="{BB962C8B-B14F-4D97-AF65-F5344CB8AC3E}">
+        <p14:creationId xmlns:p14="http://schemas.microsoft.com/office/powerpoint/2010/main" val="913602156"/>
+      </p:ext>
+    </p:extLst>
+  </p:cSld>
+  <p:clrMapOvr>
+    <a:masterClrMapping/>
+  </p:clrMapOvr>
+</p:sld>
+</file>
+
+<file path=ppt/slides/slide26.xml><?xml version="1.0" encoding="utf-8"?>
+<p:sld xmlns:a="http://schemas.openxmlformats.org/drawingml/2006/main" xmlns:r="http://schemas.openxmlformats.org/officeDocument/2006/relationships" xmlns:p="http://schemas.openxmlformats.org/presentationml/2006/main">
+  <p:cSld>
+    <p:spTree>
+      <p:nvGrpSpPr>
+        <p:cNvPr id="1" name=""/>
+        <p:cNvGrpSpPr/>
+        <p:nvPr/>
+      </p:nvGrpSpPr>
+      <p:grpSpPr>
+        <a:xfrm>
+          <a:off x="0" y="0"/>
+          <a:ext cx="0" cy="0"/>
+          <a:chOff x="0" y="0"/>
+          <a:chExt cx="0" cy="0"/>
+        </a:xfrm>
+      </p:grpSpPr>
+      <p:sp>
+        <p:nvSpPr>
+          <p:cNvPr id="3" name="Title 2">
+            <a:extLst>
+              <a:ext uri="{FF2B5EF4-FFF2-40B4-BE49-F238E27FC236}">
+                <a16:creationId xmlns:a16="http://schemas.microsoft.com/office/drawing/2014/main" id="{094079E4-2119-BB2E-9B7B-E4E229019E33}"/>
+              </a:ext>
+            </a:extLst>
+          </p:cNvPr>
+          <p:cNvSpPr>
+            <a:spLocks noGrp="1"/>
+          </p:cNvSpPr>
+          <p:nvPr>
+            <p:ph type="title"/>
+          </p:nvPr>
+        </p:nvSpPr>
+        <p:spPr/>
+        <p:txBody>
+          <a:bodyPr/>
+          <a:lstStyle/>
+          <a:p>
+            <a:r>
+              <a:rPr lang="en-US" dirty="0"/>
+              <a:t>Response Caching</a:t>
+            </a:r>
+          </a:p>
+        </p:txBody>
+      </p:sp>
+      <p:pic>
+        <p:nvPicPr>
+          <p:cNvPr id="5" name="Picture 4">
+            <a:extLst>
+              <a:ext uri="{FF2B5EF4-FFF2-40B4-BE49-F238E27FC236}">
+                <a16:creationId xmlns:a16="http://schemas.microsoft.com/office/drawing/2014/main" id="{D13579B1-5707-A4D2-D189-19236FA8734C}"/>
+              </a:ext>
+            </a:extLst>
+          </p:cNvPr>
+          <p:cNvPicPr>
+            <a:picLocks noChangeAspect="1"/>
+          </p:cNvPicPr>
+          <p:nvPr/>
+        </p:nvPicPr>
+        <p:blipFill>
+          <a:blip r:embed="rId2"/>
+          <a:stretch>
+            <a:fillRect/>
+          </a:stretch>
+        </p:blipFill>
+        <p:spPr>
+          <a:xfrm>
+            <a:off x="2542940" y="1533486"/>
+            <a:ext cx="4077269" cy="552527"/>
+          </a:xfrm>
+          <a:prstGeom prst="rect">
+            <a:avLst/>
+          </a:prstGeom>
+        </p:spPr>
+      </p:pic>
+      <p:pic>
+        <p:nvPicPr>
+          <p:cNvPr id="7" name="Picture 6">
+            <a:extLst>
+              <a:ext uri="{FF2B5EF4-FFF2-40B4-BE49-F238E27FC236}">
+                <a16:creationId xmlns:a16="http://schemas.microsoft.com/office/drawing/2014/main" id="{5D33C3FF-773A-DD70-2CC3-39169DE3A0F4}"/>
+              </a:ext>
+            </a:extLst>
+          </p:cNvPr>
+          <p:cNvPicPr>
+            <a:picLocks noChangeAspect="1"/>
+          </p:cNvPicPr>
+          <p:nvPr/>
+        </p:nvPicPr>
+        <p:blipFill>
+          <a:blip r:embed="rId3"/>
+          <a:stretch>
+            <a:fillRect/>
+          </a:stretch>
+        </p:blipFill>
+        <p:spPr>
+          <a:xfrm>
+            <a:off x="3209734" y="2467797"/>
+            <a:ext cx="2724530" cy="809738"/>
+          </a:xfrm>
+          <a:prstGeom prst="rect">
+            <a:avLst/>
+          </a:prstGeom>
+        </p:spPr>
+      </p:pic>
+      <p:pic>
+        <p:nvPicPr>
+          <p:cNvPr id="9" name="Picture 8">
+            <a:extLst>
+              <a:ext uri="{FF2B5EF4-FFF2-40B4-BE49-F238E27FC236}">
+                <a16:creationId xmlns:a16="http://schemas.microsoft.com/office/drawing/2014/main" id="{2E0F9337-A512-73D2-E5D6-457049675F4D}"/>
+              </a:ext>
+            </a:extLst>
+          </p:cNvPr>
+          <p:cNvPicPr>
+            <a:picLocks noChangeAspect="1"/>
+          </p:cNvPicPr>
+          <p:nvPr/>
+        </p:nvPicPr>
+        <p:blipFill>
+          <a:blip r:embed="rId4"/>
+          <a:stretch>
+            <a:fillRect/>
+          </a:stretch>
+        </p:blipFill>
+        <p:spPr>
+          <a:xfrm>
+            <a:off x="1169828" y="3659320"/>
+            <a:ext cx="6804343" cy="1124880"/>
+          </a:xfrm>
+          <a:prstGeom prst="rect">
+            <a:avLst/>
+          </a:prstGeom>
+        </p:spPr>
+      </p:pic>
+      <p:sp>
+        <p:nvSpPr>
+          <p:cNvPr id="10" name="TextBox 9">
+            <a:extLst>
+              <a:ext uri="{FF2B5EF4-FFF2-40B4-BE49-F238E27FC236}">
+                <a16:creationId xmlns:a16="http://schemas.microsoft.com/office/drawing/2014/main" id="{45A60374-C512-77DA-F5AD-C28E8164438A}"/>
+              </a:ext>
+            </a:extLst>
+          </p:cNvPr>
+          <p:cNvSpPr txBox="1"/>
+          <p:nvPr/>
+        </p:nvSpPr>
+        <p:spPr>
+          <a:xfrm>
+            <a:off x="2542940" y="1219478"/>
+            <a:ext cx="1149674" cy="307777"/>
+          </a:xfrm>
+          <a:prstGeom prst="rect">
+            <a:avLst/>
+          </a:prstGeom>
+          <a:noFill/>
+        </p:spPr>
+        <p:txBody>
+          <a:bodyPr wrap="none" rtlCol="0">
+            <a:spAutoFit/>
+          </a:bodyPr>
+          <a:lstStyle/>
+          <a:p>
+            <a:r>
+              <a:rPr lang="en-US" dirty="0" err="1">
+                <a:solidFill>
+                  <a:schemeClr val="bg1"/>
+                </a:solidFill>
+              </a:rPr>
+              <a:t>Program.cs</a:t>
+            </a:r>
+            <a:r>
+              <a:rPr lang="en-US" dirty="0">
+                <a:solidFill>
+                  <a:schemeClr val="bg1"/>
+                </a:solidFill>
+              </a:rPr>
+              <a:t>:</a:t>
+            </a:r>
+          </a:p>
+        </p:txBody>
+      </p:sp>
+      <p:sp>
+        <p:nvSpPr>
+          <p:cNvPr id="11" name="TextBox 10">
+            <a:extLst>
+              <a:ext uri="{FF2B5EF4-FFF2-40B4-BE49-F238E27FC236}">
+                <a16:creationId xmlns:a16="http://schemas.microsoft.com/office/drawing/2014/main" id="{A5EEBCA1-D3F0-F9FC-C11E-043AD89A1BD0}"/>
+              </a:ext>
+            </a:extLst>
+          </p:cNvPr>
+          <p:cNvSpPr txBox="1"/>
+          <p:nvPr/>
+        </p:nvSpPr>
+        <p:spPr>
+          <a:xfrm>
+            <a:off x="3209734" y="2160020"/>
+            <a:ext cx="2430474" cy="307777"/>
+          </a:xfrm>
+          <a:prstGeom prst="rect">
+            <a:avLst/>
+          </a:prstGeom>
+          <a:noFill/>
+        </p:spPr>
+        <p:txBody>
+          <a:bodyPr wrap="none" rtlCol="0">
+            <a:spAutoFit/>
+          </a:bodyPr>
+          <a:lstStyle/>
+          <a:p>
+            <a:r>
+              <a:rPr lang="en-US" dirty="0" err="1">
+                <a:solidFill>
+                  <a:schemeClr val="bg1"/>
+                </a:solidFill>
+              </a:rPr>
+              <a:t>Program.cs</a:t>
+            </a:r>
+            <a:r>
+              <a:rPr lang="en-US" dirty="0">
+                <a:solidFill>
+                  <a:schemeClr val="bg1"/>
+                </a:solidFill>
+              </a:rPr>
+              <a:t> (order matters!):</a:t>
+            </a:r>
+          </a:p>
+        </p:txBody>
+      </p:sp>
+      <p:sp>
+        <p:nvSpPr>
+          <p:cNvPr id="12" name="TextBox 11">
+            <a:extLst>
+              <a:ext uri="{FF2B5EF4-FFF2-40B4-BE49-F238E27FC236}">
+                <a16:creationId xmlns:a16="http://schemas.microsoft.com/office/drawing/2014/main" id="{FFE87823-44D8-A887-1793-DD29442950AA}"/>
+              </a:ext>
+            </a:extLst>
+          </p:cNvPr>
+          <p:cNvSpPr txBox="1"/>
+          <p:nvPr/>
+        </p:nvSpPr>
+        <p:spPr>
+          <a:xfrm>
+            <a:off x="1141282" y="3351543"/>
+            <a:ext cx="3764172" cy="307777"/>
+          </a:xfrm>
+          <a:prstGeom prst="rect">
+            <a:avLst/>
+          </a:prstGeom>
+          <a:noFill/>
+        </p:spPr>
+        <p:txBody>
+          <a:bodyPr wrap="none" rtlCol="0">
+            <a:spAutoFit/>
+          </a:bodyPr>
+          <a:lstStyle/>
+          <a:p>
+            <a:r>
+              <a:rPr lang="en-US" dirty="0">
+                <a:solidFill>
+                  <a:schemeClr val="bg1"/>
+                </a:solidFill>
+              </a:rPr>
+              <a:t>Controller (response cached for 60 seconds):</a:t>
+            </a:r>
+          </a:p>
+        </p:txBody>
+      </p:sp>
+    </p:spTree>
+    <p:extLst>
+      <p:ext uri="{BB962C8B-B14F-4D97-AF65-F5344CB8AC3E}">
+        <p14:creationId xmlns:p14="http://schemas.microsoft.com/office/powerpoint/2010/main" val="1295246680"/>
+      </p:ext>
+    </p:extLst>
+  </p:cSld>
+  <p:clrMapOvr>
+    <a:masterClrMapping/>
+  </p:clrMapOvr>
+</p:sld>
+</file>
+
+<file path=ppt/slides/slide27.xml><?xml version="1.0" encoding="utf-8"?>
+<p:sld xmlns:a="http://schemas.openxmlformats.org/drawingml/2006/main" xmlns:r="http://schemas.openxmlformats.org/officeDocument/2006/relationships" xmlns:p="http://schemas.openxmlformats.org/presentationml/2006/main">
+  <p:cSld>
+    <p:spTree>
+      <p:nvGrpSpPr>
+        <p:cNvPr id="1" name=""/>
+        <p:cNvGrpSpPr/>
+        <p:nvPr/>
+      </p:nvGrpSpPr>
+      <p:grpSpPr>
+        <a:xfrm>
+          <a:off x="0" y="0"/>
+          <a:ext cx="0" cy="0"/>
+          <a:chOff x="0" y="0"/>
+          <a:chExt cx="0" cy="0"/>
+        </a:xfrm>
+      </p:grpSpPr>
+      <p:sp>
+        <p:nvSpPr>
+          <p:cNvPr id="3" name="Title 2">
+            <a:extLst>
+              <a:ext uri="{FF2B5EF4-FFF2-40B4-BE49-F238E27FC236}">
+                <a16:creationId xmlns:a16="http://schemas.microsoft.com/office/drawing/2014/main" id="{E4422C78-55D8-7643-8334-D2A546A5DF12}"/>
+              </a:ext>
+            </a:extLst>
+          </p:cNvPr>
+          <p:cNvSpPr>
+            <a:spLocks noGrp="1"/>
+          </p:cNvSpPr>
+          <p:nvPr>
+            <p:ph type="title"/>
+          </p:nvPr>
+        </p:nvSpPr>
+        <p:spPr/>
+        <p:txBody>
+          <a:bodyPr/>
+          <a:lstStyle/>
+          <a:p>
+            <a:r>
+              <a:rPr lang="en-US" dirty="0"/>
+              <a:t>Response Cache vs Memory Cache</a:t>
+            </a:r>
+          </a:p>
+        </p:txBody>
+      </p:sp>
+      <p:graphicFrame>
+        <p:nvGraphicFramePr>
+          <p:cNvPr id="4" name="Table 3">
+            <a:extLst>
+              <a:ext uri="{FF2B5EF4-FFF2-40B4-BE49-F238E27FC236}">
+                <a16:creationId xmlns:a16="http://schemas.microsoft.com/office/drawing/2014/main" id="{EF9FD91A-6F07-E088-A7B5-2C1AF0CE15D4}"/>
+              </a:ext>
+            </a:extLst>
+          </p:cNvPr>
+          <p:cNvGraphicFramePr>
+            <a:graphicFrameLocks noGrp="1"/>
+          </p:cNvGraphicFramePr>
+          <p:nvPr>
+            <p:extLst>
+              <p:ext uri="{D42A27DB-BD31-4B8C-83A1-F6EECF244321}">
+                <p14:modId xmlns:p14="http://schemas.microsoft.com/office/powerpoint/2010/main" val="613441201"/>
+              </p:ext>
+            </p:extLst>
+          </p:nvPr>
+        </p:nvGraphicFramePr>
+        <p:xfrm>
+          <a:off x="320724" y="1965940"/>
+          <a:ext cx="8521701" cy="1524000"/>
+        </p:xfrm>
+        <a:graphic>
+          <a:graphicData uri="http://schemas.openxmlformats.org/drawingml/2006/table">
+            <a:tbl>
+              <a:tblPr/>
+              <a:tblGrid>
+                <a:gridCol w="2840567">
+                  <a:extLst>
+                    <a:ext uri="{9D8B030D-6E8A-4147-A177-3AD203B41FA5}">
+                      <a16:colId xmlns:a16="http://schemas.microsoft.com/office/drawing/2014/main" val="1501269818"/>
+                    </a:ext>
+                  </a:extLst>
+                </a:gridCol>
+                <a:gridCol w="2840567">
+                  <a:extLst>
+                    <a:ext uri="{9D8B030D-6E8A-4147-A177-3AD203B41FA5}">
+                      <a16:colId xmlns:a16="http://schemas.microsoft.com/office/drawing/2014/main" val="4274574750"/>
+                    </a:ext>
+                  </a:extLst>
+                </a:gridCol>
+                <a:gridCol w="2840567">
+                  <a:extLst>
+                    <a:ext uri="{9D8B030D-6E8A-4147-A177-3AD203B41FA5}">
+                      <a16:colId xmlns:a16="http://schemas.microsoft.com/office/drawing/2014/main" val="499104711"/>
+                    </a:ext>
+                  </a:extLst>
+                </a:gridCol>
+              </a:tblGrid>
+              <a:tr h="304800">
+                <a:tc>
+                  <a:txBody>
+                    <a:bodyPr/>
+                    <a:lstStyle/>
+                    <a:p>
+                      <a:pPr>
+                        <a:buNone/>
+                      </a:pPr>
+                      <a:r>
+                        <a:rPr lang="en-US" sz="1400"/>
+                        <a:t>Feature</a:t>
+                      </a:r>
+                    </a:p>
+                  </a:txBody>
+                  <a:tcPr anchor="ctr">
+                    <a:lnL>
+                      <a:noFill/>
+                    </a:lnL>
+                    <a:lnR>
+                      <a:noFill/>
+                    </a:lnR>
+                    <a:lnT>
+                      <a:noFill/>
+                    </a:lnT>
+                    <a:lnB>
+                      <a:noFill/>
+                    </a:lnB>
+                    <a:noFill/>
+                  </a:tcPr>
+                </a:tc>
+                <a:tc>
+                  <a:txBody>
+                    <a:bodyPr/>
+                    <a:lstStyle/>
+                    <a:p>
+                      <a:pPr>
+                        <a:buNone/>
+                      </a:pPr>
+                      <a:r>
+                        <a:rPr lang="en-US" sz="1400"/>
+                        <a:t>IMemoryCache</a:t>
+                      </a:r>
+                    </a:p>
+                  </a:txBody>
+                  <a:tcPr anchor="ctr">
+                    <a:lnL>
+                      <a:noFill/>
+                    </a:lnL>
+                    <a:lnR>
+                      <a:noFill/>
+                    </a:lnR>
+                    <a:lnT>
+                      <a:noFill/>
+                    </a:lnT>
+                    <a:lnB>
+                      <a:noFill/>
+                    </a:lnB>
+                    <a:noFill/>
+                  </a:tcPr>
+                </a:tc>
+                <a:tc>
+                  <a:txBody>
+                    <a:bodyPr/>
+                    <a:lstStyle/>
+                    <a:p>
+                      <a:pPr>
+                        <a:buNone/>
+                      </a:pPr>
+                      <a:r>
+                        <a:rPr lang="en-US" sz="1400"/>
+                        <a:t>Response Cache</a:t>
+                      </a:r>
+                    </a:p>
+                  </a:txBody>
+                  <a:tcPr anchor="ctr">
+                    <a:lnL>
+                      <a:noFill/>
+                    </a:lnL>
+                    <a:lnR>
+                      <a:noFill/>
+                    </a:lnR>
+                    <a:lnT>
+                      <a:noFill/>
+                    </a:lnT>
+                    <a:lnB>
+                      <a:noFill/>
+                    </a:lnB>
+                    <a:noFill/>
+                  </a:tcPr>
+                </a:tc>
+                <a:extLst>
+                  <a:ext uri="{0D108BD9-81ED-4DB2-BD59-A6C34878D82A}">
+                    <a16:rowId xmlns:a16="http://schemas.microsoft.com/office/drawing/2014/main" val="2530862434"/>
+                  </a:ext>
+                </a:extLst>
+              </a:tr>
+              <a:tr h="304800">
+                <a:tc>
+                  <a:txBody>
+                    <a:bodyPr/>
+                    <a:lstStyle/>
+                    <a:p>
+                      <a:pPr>
+                        <a:buNone/>
+                      </a:pPr>
+                      <a:r>
+                        <a:rPr lang="en-US" sz="1400"/>
+                        <a:t>Stores objects</a:t>
+                      </a:r>
+                    </a:p>
+                  </a:txBody>
+                  <a:tcPr anchor="ctr">
+                    <a:lnL>
+                      <a:noFill/>
+                    </a:lnL>
+                    <a:lnR>
+                      <a:noFill/>
+                    </a:lnR>
+                    <a:lnT>
+                      <a:noFill/>
+                    </a:lnT>
+                    <a:lnB>
+                      <a:noFill/>
+                    </a:lnB>
+                    <a:noFill/>
+                  </a:tcPr>
+                </a:tc>
+                <a:tc>
+                  <a:txBody>
+                    <a:bodyPr/>
+                    <a:lstStyle/>
+                    <a:p>
+                      <a:pPr>
+                        <a:buNone/>
+                      </a:pPr>
+                      <a:r>
+                        <a:rPr lang="en-US" sz="1400"/>
+                        <a:t>Yes</a:t>
+                      </a:r>
+                    </a:p>
+                  </a:txBody>
+                  <a:tcPr anchor="ctr">
+                    <a:lnL>
+                      <a:noFill/>
+                    </a:lnL>
+                    <a:lnR>
+                      <a:noFill/>
+                    </a:lnR>
+                    <a:lnT>
+                      <a:noFill/>
+                    </a:lnT>
+                    <a:lnB>
+                      <a:noFill/>
+                    </a:lnB>
+                    <a:noFill/>
+                  </a:tcPr>
+                </a:tc>
+                <a:tc>
+                  <a:txBody>
+                    <a:bodyPr/>
+                    <a:lstStyle/>
+                    <a:p>
+                      <a:pPr>
+                        <a:buNone/>
+                      </a:pPr>
+                      <a:r>
+                        <a:rPr lang="en-US" sz="1400"/>
+                        <a:t>No</a:t>
+                      </a:r>
+                    </a:p>
+                  </a:txBody>
+                  <a:tcPr anchor="ctr">
+                    <a:lnL>
+                      <a:noFill/>
+                    </a:lnL>
+                    <a:lnR>
+                      <a:noFill/>
+                    </a:lnR>
+                    <a:lnT>
+                      <a:noFill/>
+                    </a:lnT>
+                    <a:lnB>
+                      <a:noFill/>
+                    </a:lnB>
+                    <a:noFill/>
+                  </a:tcPr>
+                </a:tc>
+                <a:extLst>
+                  <a:ext uri="{0D108BD9-81ED-4DB2-BD59-A6C34878D82A}">
+                    <a16:rowId xmlns:a16="http://schemas.microsoft.com/office/drawing/2014/main" val="2755264362"/>
+                  </a:ext>
+                </a:extLst>
+              </a:tr>
+              <a:tr h="304800">
+                <a:tc>
+                  <a:txBody>
+                    <a:bodyPr/>
+                    <a:lstStyle/>
+                    <a:p>
+                      <a:pPr>
+                        <a:buNone/>
+                      </a:pPr>
+                      <a:r>
+                        <a:rPr lang="en-US" sz="1400"/>
+                        <a:t>Stores HTTP responses</a:t>
+                      </a:r>
+                    </a:p>
+                  </a:txBody>
+                  <a:tcPr anchor="ctr">
+                    <a:lnL>
+                      <a:noFill/>
+                    </a:lnL>
+                    <a:lnR>
+                      <a:noFill/>
+                    </a:lnR>
+                    <a:lnT>
+                      <a:noFill/>
+                    </a:lnT>
+                    <a:lnB>
+                      <a:noFill/>
+                    </a:lnB>
+                    <a:noFill/>
+                  </a:tcPr>
+                </a:tc>
+                <a:tc>
+                  <a:txBody>
+                    <a:bodyPr/>
+                    <a:lstStyle/>
+                    <a:p>
+                      <a:pPr>
+                        <a:buNone/>
+                      </a:pPr>
+                      <a:r>
+                        <a:rPr lang="en-US" sz="1400"/>
+                        <a:t>No</a:t>
+                      </a:r>
+                    </a:p>
+                  </a:txBody>
+                  <a:tcPr anchor="ctr">
+                    <a:lnL>
+                      <a:noFill/>
+                    </a:lnL>
+                    <a:lnR>
+                      <a:noFill/>
+                    </a:lnR>
+                    <a:lnT>
+                      <a:noFill/>
+                    </a:lnT>
+                    <a:lnB>
+                      <a:noFill/>
+                    </a:lnB>
+                    <a:noFill/>
+                  </a:tcPr>
+                </a:tc>
+                <a:tc>
+                  <a:txBody>
+                    <a:bodyPr/>
+                    <a:lstStyle/>
+                    <a:p>
+                      <a:pPr>
+                        <a:buNone/>
+                      </a:pPr>
+                      <a:r>
+                        <a:rPr lang="en-US" sz="1400"/>
+                        <a:t>Yes</a:t>
+                      </a:r>
+                    </a:p>
+                  </a:txBody>
+                  <a:tcPr anchor="ctr">
+                    <a:lnL>
+                      <a:noFill/>
+                    </a:lnL>
+                    <a:lnR>
+                      <a:noFill/>
+                    </a:lnR>
+                    <a:lnT>
+                      <a:noFill/>
+                    </a:lnT>
+                    <a:lnB>
+                      <a:noFill/>
+                    </a:lnB>
+                    <a:noFill/>
+                  </a:tcPr>
+                </a:tc>
+                <a:extLst>
+                  <a:ext uri="{0D108BD9-81ED-4DB2-BD59-A6C34878D82A}">
+                    <a16:rowId xmlns:a16="http://schemas.microsoft.com/office/drawing/2014/main" val="4107545865"/>
+                  </a:ext>
+                </a:extLst>
+              </a:tr>
+              <a:tr h="304800">
+                <a:tc>
+                  <a:txBody>
+                    <a:bodyPr/>
+                    <a:lstStyle/>
+                    <a:p>
+                      <a:pPr>
+                        <a:buNone/>
+                      </a:pPr>
+                      <a:r>
+                        <a:rPr lang="en-US" sz="1400"/>
+                        <a:t>Flexible</a:t>
+                      </a:r>
+                    </a:p>
+                  </a:txBody>
+                  <a:tcPr anchor="ctr">
+                    <a:lnL>
+                      <a:noFill/>
+                    </a:lnL>
+                    <a:lnR>
+                      <a:noFill/>
+                    </a:lnR>
+                    <a:lnT>
+                      <a:noFill/>
+                    </a:lnT>
+                    <a:lnB>
+                      <a:noFill/>
+                    </a:lnB>
+                    <a:noFill/>
+                  </a:tcPr>
+                </a:tc>
+                <a:tc>
+                  <a:txBody>
+                    <a:bodyPr/>
+                    <a:lstStyle/>
+                    <a:p>
+                      <a:pPr>
+                        <a:buNone/>
+                      </a:pPr>
+                      <a:r>
+                        <a:rPr lang="en-US" sz="1400"/>
+                        <a:t>Very</a:t>
+                      </a:r>
+                    </a:p>
+                  </a:txBody>
+                  <a:tcPr anchor="ctr">
+                    <a:lnL>
+                      <a:noFill/>
+                    </a:lnL>
+                    <a:lnR>
+                      <a:noFill/>
+                    </a:lnR>
+                    <a:lnT>
+                      <a:noFill/>
+                    </a:lnT>
+                    <a:lnB>
+                      <a:noFill/>
+                    </a:lnB>
+                    <a:noFill/>
+                  </a:tcPr>
+                </a:tc>
+                <a:tc>
+                  <a:txBody>
+                    <a:bodyPr/>
+                    <a:lstStyle/>
+                    <a:p>
+                      <a:pPr>
+                        <a:buNone/>
+                      </a:pPr>
+                      <a:r>
+                        <a:rPr lang="en-US" sz="1400"/>
+                        <a:t>Limited</a:t>
+                      </a:r>
+                    </a:p>
+                  </a:txBody>
+                  <a:tcPr anchor="ctr">
+                    <a:lnL>
+                      <a:noFill/>
+                    </a:lnL>
+                    <a:lnR>
+                      <a:noFill/>
+                    </a:lnR>
+                    <a:lnT>
+                      <a:noFill/>
+                    </a:lnT>
+                    <a:lnB>
+                      <a:noFill/>
+                    </a:lnB>
+                    <a:noFill/>
+                  </a:tcPr>
+                </a:tc>
+                <a:extLst>
+                  <a:ext uri="{0D108BD9-81ED-4DB2-BD59-A6C34878D82A}">
+                    <a16:rowId xmlns:a16="http://schemas.microsoft.com/office/drawing/2014/main" val="234724570"/>
+                  </a:ext>
+                </a:extLst>
+              </a:tr>
+              <a:tr h="304800">
+                <a:tc>
+                  <a:txBody>
+                    <a:bodyPr/>
+                    <a:lstStyle/>
+                    <a:p>
+                      <a:pPr>
+                        <a:buNone/>
+                      </a:pPr>
+                      <a:r>
+                        <a:rPr lang="en-US" sz="1400"/>
+                        <a:t>Best for</a:t>
+                      </a:r>
+                    </a:p>
+                  </a:txBody>
+                  <a:tcPr anchor="ctr">
+                    <a:lnL>
+                      <a:noFill/>
+                    </a:lnL>
+                    <a:lnR>
+                      <a:noFill/>
+                    </a:lnR>
+                    <a:lnT>
+                      <a:noFill/>
+                    </a:lnT>
+                    <a:lnB>
+                      <a:noFill/>
+                    </a:lnB>
+                    <a:noFill/>
+                  </a:tcPr>
+                </a:tc>
+                <a:tc>
+                  <a:txBody>
+                    <a:bodyPr/>
+                    <a:lstStyle/>
+                    <a:p>
+                      <a:pPr>
+                        <a:buNone/>
+                      </a:pPr>
+                      <a:r>
+                        <a:rPr lang="en-US" sz="1400"/>
+                        <a:t>Business logic</a:t>
+                      </a:r>
+                    </a:p>
+                  </a:txBody>
+                  <a:tcPr anchor="ctr">
+                    <a:lnL>
+                      <a:noFill/>
+                    </a:lnL>
+                    <a:lnR>
+                      <a:noFill/>
+                    </a:lnR>
+                    <a:lnT>
+                      <a:noFill/>
+                    </a:lnT>
+                    <a:lnB>
+                      <a:noFill/>
+                    </a:lnB>
+                    <a:noFill/>
+                  </a:tcPr>
+                </a:tc>
+                <a:tc>
+                  <a:txBody>
+                    <a:bodyPr/>
+                    <a:lstStyle/>
+                    <a:p>
+                      <a:pPr>
+                        <a:buNone/>
+                      </a:pPr>
+                      <a:r>
+                        <a:rPr lang="en-US" sz="1400" dirty="0"/>
+                        <a:t>Public GET endpoints</a:t>
+                      </a:r>
+                    </a:p>
+                  </a:txBody>
+                  <a:tcPr anchor="ctr">
+                    <a:lnL>
+                      <a:noFill/>
+                    </a:lnL>
+                    <a:lnR>
+                      <a:noFill/>
+                    </a:lnR>
+                    <a:lnT>
+                      <a:noFill/>
+                    </a:lnT>
+                    <a:lnB>
+                      <a:noFill/>
+                    </a:lnB>
+                    <a:noFill/>
+                  </a:tcPr>
+                </a:tc>
+                <a:extLst>
+                  <a:ext uri="{0D108BD9-81ED-4DB2-BD59-A6C34878D82A}">
+                    <a16:rowId xmlns:a16="http://schemas.microsoft.com/office/drawing/2014/main" val="2954175756"/>
+                  </a:ext>
+                </a:extLst>
+              </a:tr>
+            </a:tbl>
+          </a:graphicData>
+        </a:graphic>
+      </p:graphicFrame>
+    </p:spTree>
+    <p:extLst>
+      <p:ext uri="{BB962C8B-B14F-4D97-AF65-F5344CB8AC3E}">
+        <p14:creationId xmlns:p14="http://schemas.microsoft.com/office/powerpoint/2010/main" val="1803069924"/>
+      </p:ext>
+    </p:extLst>
   </p:cSld>
   <p:clrMapOvr>
     <a:masterClrMapping/>
